--- a/Pregrado/Investigacion en ciencia y tecnologia/Clases/Sesion 03 - Prueba parcial · 1.er avance del artículo/Presentacion.pptx
+++ b/Pregrado/Investigacion en ciencia y tecnologia/Clases/Sesion 03 - Prueba parcial · 1.er avance del artículo/Presentacion.pptx
@@ -3364,41 +3364,6 @@
                 <a:latin typeface="Calibri"/>
               </a:rPr>
               <a:t> INVESTIGACIÓN, CIENCIA Y TECNOLOGÍA</a:t>
-            </a:r>
-          </a:p>
-        </p:txBody>
-      </p:sp>
-      <p:sp>
-        <p:nvSpPr>
-          <p:cNvPr id="7" name="TextBox 6"/>
-          <p:cNvSpPr txBox="1"/>
-          <p:nvPr/>
-        </p:nvSpPr>
-        <p:spPr>
-          <a:xfrm>
-            <a:off x="2194560" y="6446520"/>
-            <a:ext cx="5943600" cy="274320"/>
-          </a:xfrm>
-          <a:prstGeom prst="rect">
-            <a:avLst/>
-          </a:prstGeom>
-          <a:noFill/>
-        </p:spPr>
-        <p:txBody>
-          <a:bodyPr wrap="square" anchor="t" lIns="0" rIns="0" tIns="0" bIns="0">
-            <a:spAutoFit/>
-          </a:bodyPr>
-          <a:lstStyle/>
-          <a:p>
-            <a:pPr algn="l"/>
-            <a:r>
-              <a:rPr sz="1000" b="1" i="0">
-                <a:solidFill>
-                  <a:srgbClr val="8F989D"/>
-                </a:solidFill>
-                <a:latin typeface="Calibri"/>
-              </a:rPr>
-              <a:t>Inicio 5:10 pm</a:t>
             </a:r>
           </a:p>
         </p:txBody>
@@ -4008,41 +3973,6 @@
         </p:nvSpPr>
         <p:spPr>
           <a:xfrm>
-            <a:off x="2194560" y="6446520"/>
-            <a:ext cx="5943600" cy="274320"/>
-          </a:xfrm>
-          <a:prstGeom prst="rect">
-            <a:avLst/>
-          </a:prstGeom>
-          <a:noFill/>
-        </p:spPr>
-        <p:txBody>
-          <a:bodyPr wrap="square" anchor="t" lIns="0" rIns="0" tIns="0" bIns="0">
-            <a:spAutoFit/>
-          </a:bodyPr>
-          <a:lstStyle/>
-          <a:p>
-            <a:pPr algn="l"/>
-            <a:r>
-              <a:rPr sz="1000" b="1" i="0">
-                <a:solidFill>
-                  <a:srgbClr val="8F989D"/>
-                </a:solidFill>
-                <a:latin typeface="Calibri"/>
-              </a:rPr>
-              <a:t>Inicio 5:10 pm</a:t>
-            </a:r>
-          </a:p>
-        </p:txBody>
-      </p:sp>
-      <p:sp>
-        <p:nvSpPr>
-          <p:cNvPr id="7" name="TextBox 6"/>
-          <p:cNvSpPr txBox="1"/>
-          <p:nvPr/>
-        </p:nvSpPr>
-        <p:spPr>
-          <a:xfrm>
             <a:off x="11094415" y="6446520"/>
             <a:ext cx="548640" cy="274320"/>
           </a:xfrm>
@@ -4528,41 +4458,6 @@
         </p:nvSpPr>
         <p:spPr>
           <a:xfrm>
-            <a:off x="2194560" y="6446520"/>
-            <a:ext cx="5943600" cy="274320"/>
-          </a:xfrm>
-          <a:prstGeom prst="rect">
-            <a:avLst/>
-          </a:prstGeom>
-          <a:noFill/>
-        </p:spPr>
-        <p:txBody>
-          <a:bodyPr wrap="square" anchor="t" lIns="0" rIns="0" tIns="0" bIns="0">
-            <a:spAutoFit/>
-          </a:bodyPr>
-          <a:lstStyle/>
-          <a:p>
-            <a:pPr algn="l"/>
-            <a:r>
-              <a:rPr sz="1000" b="1" i="0">
-                <a:solidFill>
-                  <a:srgbClr val="8F989D"/>
-                </a:solidFill>
-                <a:latin typeface="Calibri"/>
-              </a:rPr>
-              <a:t>Inicio 5:10 pm</a:t>
-            </a:r>
-          </a:p>
-        </p:txBody>
-      </p:sp>
-      <p:sp>
-        <p:nvSpPr>
-          <p:cNvPr id="11" name="TextBox 10"/>
-          <p:cNvSpPr txBox="1"/>
-          <p:nvPr/>
-        </p:nvSpPr>
-        <p:spPr>
-          <a:xfrm>
             <a:off x="11094415" y="6446520"/>
             <a:ext cx="548640" cy="274320"/>
           </a:xfrm>
@@ -4806,41 +4701,6 @@
         </p:nvSpPr>
         <p:spPr>
           <a:xfrm>
-            <a:off x="2194560" y="6446520"/>
-            <a:ext cx="5943600" cy="274320"/>
-          </a:xfrm>
-          <a:prstGeom prst="rect">
-            <a:avLst/>
-          </a:prstGeom>
-          <a:noFill/>
-        </p:spPr>
-        <p:txBody>
-          <a:bodyPr wrap="square" anchor="t" lIns="0" rIns="0" tIns="0" bIns="0">
-            <a:spAutoFit/>
-          </a:bodyPr>
-          <a:lstStyle/>
-          <a:p>
-            <a:pPr algn="l"/>
-            <a:r>
-              <a:rPr sz="1000" b="1" i="0">
-                <a:solidFill>
-                  <a:srgbClr val="8F989D"/>
-                </a:solidFill>
-                <a:latin typeface="Calibri"/>
-              </a:rPr>
-              <a:t>Inicio 5:10 pm</a:t>
-            </a:r>
-          </a:p>
-        </p:txBody>
-      </p:sp>
-      <p:sp>
-        <p:nvSpPr>
-          <p:cNvPr id="7" name="TextBox 6"/>
-          <p:cNvSpPr txBox="1"/>
-          <p:nvPr/>
-        </p:nvSpPr>
-        <p:spPr>
-          <a:xfrm>
             <a:off x="11094415" y="6446520"/>
             <a:ext cx="548640" cy="274320"/>
           </a:xfrm>
@@ -5292,41 +5152,6 @@
         </p:nvSpPr>
         <p:spPr>
           <a:xfrm>
-            <a:off x="2194560" y="6446520"/>
-            <a:ext cx="5943600" cy="274320"/>
-          </a:xfrm>
-          <a:prstGeom prst="rect">
-            <a:avLst/>
-          </a:prstGeom>
-          <a:noFill/>
-        </p:spPr>
-        <p:txBody>
-          <a:bodyPr wrap="square" anchor="t" lIns="0" rIns="0" tIns="0" bIns="0">
-            <a:spAutoFit/>
-          </a:bodyPr>
-          <a:lstStyle/>
-          <a:p>
-            <a:pPr algn="l"/>
-            <a:r>
-              <a:rPr sz="1000" b="1" i="0">
-                <a:solidFill>
-                  <a:srgbClr val="8F989D"/>
-                </a:solidFill>
-                <a:latin typeface="Calibri"/>
-              </a:rPr>
-              <a:t>Inicio 5:10 pm</a:t>
-            </a:r>
-          </a:p>
-        </p:txBody>
-      </p:sp>
-      <p:sp>
-        <p:nvSpPr>
-          <p:cNvPr id="6" name="TextBox 5"/>
-          <p:cNvSpPr txBox="1"/>
-          <p:nvPr/>
-        </p:nvSpPr>
-        <p:spPr>
-          <a:xfrm>
             <a:off x="11094415" y="6446520"/>
             <a:ext cx="548640" cy="274320"/>
           </a:xfrm>
@@ -5524,41 +5349,6 @@
         </p:nvSpPr>
         <p:spPr>
           <a:xfrm>
-            <a:off x="2194560" y="6446520"/>
-            <a:ext cx="5943600" cy="274320"/>
-          </a:xfrm>
-          <a:prstGeom prst="rect">
-            <a:avLst/>
-          </a:prstGeom>
-          <a:noFill/>
-        </p:spPr>
-        <p:txBody>
-          <a:bodyPr wrap="square" anchor="t" lIns="0" rIns="0" tIns="0" bIns="0">
-            <a:spAutoFit/>
-          </a:bodyPr>
-          <a:lstStyle/>
-          <a:p>
-            <a:pPr algn="l"/>
-            <a:r>
-              <a:rPr sz="1000" b="1" i="0">
-                <a:solidFill>
-                  <a:srgbClr val="8F989D"/>
-                </a:solidFill>
-                <a:latin typeface="Calibri"/>
-              </a:rPr>
-              <a:t>Inicio 5:10 pm</a:t>
-            </a:r>
-          </a:p>
-        </p:txBody>
-      </p:sp>
-      <p:sp>
-        <p:nvSpPr>
-          <p:cNvPr id="6" name="TextBox 5"/>
-          <p:cNvSpPr txBox="1"/>
-          <p:nvPr/>
-        </p:nvSpPr>
-        <p:spPr>
-          <a:xfrm>
             <a:off x="11094415" y="6446520"/>
             <a:ext cx="548640" cy="274320"/>
           </a:xfrm>
@@ -6136,41 +5926,6 @@
         </p:nvSpPr>
         <p:spPr>
           <a:xfrm>
-            <a:off x="2194560" y="6446520"/>
-            <a:ext cx="5943600" cy="274320"/>
-          </a:xfrm>
-          <a:prstGeom prst="rect">
-            <a:avLst/>
-          </a:prstGeom>
-          <a:noFill/>
-        </p:spPr>
-        <p:txBody>
-          <a:bodyPr wrap="square" anchor="t" lIns="0" rIns="0" tIns="0" bIns="0">
-            <a:spAutoFit/>
-          </a:bodyPr>
-          <a:lstStyle/>
-          <a:p>
-            <a:pPr algn="l"/>
-            <a:r>
-              <a:rPr sz="1000" b="1" i="0">
-                <a:solidFill>
-                  <a:srgbClr val="8F989D"/>
-                </a:solidFill>
-                <a:latin typeface="Calibri"/>
-              </a:rPr>
-              <a:t>Inicio 5:10 pm</a:t>
-            </a:r>
-          </a:p>
-        </p:txBody>
-      </p:sp>
-      <p:sp>
-        <p:nvSpPr>
-          <p:cNvPr id="6" name="TextBox 5"/>
-          <p:cNvSpPr txBox="1"/>
-          <p:nvPr/>
-        </p:nvSpPr>
-        <p:spPr>
-          <a:xfrm>
             <a:off x="11094415" y="6446520"/>
             <a:ext cx="548640" cy="274320"/>
           </a:xfrm>
@@ -6404,41 +6159,6 @@
         </p:nvSpPr>
         <p:spPr>
           <a:xfrm>
-            <a:off x="2194560" y="6446520"/>
-            <a:ext cx="5943600" cy="274320"/>
-          </a:xfrm>
-          <a:prstGeom prst="rect">
-            <a:avLst/>
-          </a:prstGeom>
-          <a:noFill/>
-        </p:spPr>
-        <p:txBody>
-          <a:bodyPr wrap="square" anchor="t" lIns="0" rIns="0" tIns="0" bIns="0">
-            <a:spAutoFit/>
-          </a:bodyPr>
-          <a:lstStyle/>
-          <a:p>
-            <a:pPr algn="l"/>
-            <a:r>
-              <a:rPr sz="1000" b="1" i="0">
-                <a:solidFill>
-                  <a:srgbClr val="8F989D"/>
-                </a:solidFill>
-                <a:latin typeface="Calibri"/>
-              </a:rPr>
-              <a:t>Inicio 5:10 pm</a:t>
-            </a:r>
-          </a:p>
-        </p:txBody>
-      </p:sp>
-      <p:sp>
-        <p:nvSpPr>
-          <p:cNvPr id="6" name="TextBox 5"/>
-          <p:cNvSpPr txBox="1"/>
-          <p:nvPr/>
-        </p:nvSpPr>
-        <p:spPr>
-          <a:xfrm>
             <a:off x="11094415" y="6446520"/>
             <a:ext cx="548640" cy="274320"/>
           </a:xfrm>
@@ -6468,7 +6188,7 @@
       </p:sp>
       <p:sp>
         <p:nvSpPr>
-          <p:cNvPr id="7" name="TextBox 6"/>
+          <p:cNvPr id="6" name="TextBox 5"/>
           <p:cNvSpPr txBox="1"/>
           <p:nvPr/>
         </p:nvSpPr>
@@ -6978,41 +6698,6 @@
         </p:nvSpPr>
         <p:spPr>
           <a:xfrm>
-            <a:off x="2194560" y="6446520"/>
-            <a:ext cx="5943600" cy="274320"/>
-          </a:xfrm>
-          <a:prstGeom prst="rect">
-            <a:avLst/>
-          </a:prstGeom>
-          <a:noFill/>
-        </p:spPr>
-        <p:txBody>
-          <a:bodyPr wrap="square" anchor="t" lIns="0" rIns="0" tIns="0" bIns="0">
-            <a:spAutoFit/>
-          </a:bodyPr>
-          <a:lstStyle/>
-          <a:p>
-            <a:pPr algn="l"/>
-            <a:r>
-              <a:rPr sz="1000" b="1" i="0">
-                <a:solidFill>
-                  <a:srgbClr val="8F989D"/>
-                </a:solidFill>
-                <a:latin typeface="Calibri"/>
-              </a:rPr>
-              <a:t>Inicio 5:10 pm</a:t>
-            </a:r>
-          </a:p>
-        </p:txBody>
-      </p:sp>
-      <p:sp>
-        <p:nvSpPr>
-          <p:cNvPr id="6" name="TextBox 5"/>
-          <p:cNvSpPr txBox="1"/>
-          <p:nvPr/>
-        </p:nvSpPr>
-        <p:spPr>
-          <a:xfrm>
             <a:off x="11094415" y="6446520"/>
             <a:ext cx="548640" cy="274320"/>
           </a:xfrm>
@@ -7428,41 +7113,6 @@
         </p:nvSpPr>
         <p:spPr>
           <a:xfrm>
-            <a:off x="2194560" y="6446520"/>
-            <a:ext cx="5943600" cy="274320"/>
-          </a:xfrm>
-          <a:prstGeom prst="rect">
-            <a:avLst/>
-          </a:prstGeom>
-          <a:noFill/>
-        </p:spPr>
-        <p:txBody>
-          <a:bodyPr wrap="square" anchor="t" lIns="0" rIns="0" tIns="0" bIns="0">
-            <a:spAutoFit/>
-          </a:bodyPr>
-          <a:lstStyle/>
-          <a:p>
-            <a:pPr algn="l"/>
-            <a:r>
-              <a:rPr sz="1000" b="1" i="0">
-                <a:solidFill>
-                  <a:srgbClr val="8F989D"/>
-                </a:solidFill>
-                <a:latin typeface="Calibri"/>
-              </a:rPr>
-              <a:t>Inicio 5:10 pm</a:t>
-            </a:r>
-          </a:p>
-        </p:txBody>
-      </p:sp>
-      <p:sp>
-        <p:nvSpPr>
-          <p:cNvPr id="6" name="TextBox 5"/>
-          <p:cNvSpPr txBox="1"/>
-          <p:nvPr/>
-        </p:nvSpPr>
-        <p:spPr>
-          <a:xfrm>
             <a:off x="11094415" y="6446520"/>
             <a:ext cx="548640" cy="274320"/>
           </a:xfrm>
@@ -7676,41 +7326,6 @@
         </p:nvSpPr>
         <p:spPr>
           <a:xfrm>
-            <a:off x="2194560" y="6446520"/>
-            <a:ext cx="5943600" cy="274320"/>
-          </a:xfrm>
-          <a:prstGeom prst="rect">
-            <a:avLst/>
-          </a:prstGeom>
-          <a:noFill/>
-        </p:spPr>
-        <p:txBody>
-          <a:bodyPr wrap="square" anchor="t" lIns="0" rIns="0" tIns="0" bIns="0">
-            <a:spAutoFit/>
-          </a:bodyPr>
-          <a:lstStyle/>
-          <a:p>
-            <a:pPr algn="l"/>
-            <a:r>
-              <a:rPr sz="1000" b="1" i="0">
-                <a:solidFill>
-                  <a:srgbClr val="8F989D"/>
-                </a:solidFill>
-                <a:latin typeface="Calibri"/>
-              </a:rPr>
-              <a:t>Inicio 5:10 pm</a:t>
-            </a:r>
-          </a:p>
-        </p:txBody>
-      </p:sp>
-      <p:sp>
-        <p:nvSpPr>
-          <p:cNvPr id="6" name="TextBox 5"/>
-          <p:cNvSpPr txBox="1"/>
-          <p:nvPr/>
-        </p:nvSpPr>
-        <p:spPr>
-          <a:xfrm>
             <a:off x="11094415" y="6446520"/>
             <a:ext cx="548640" cy="274320"/>
           </a:xfrm>
@@ -8110,41 +7725,6 @@
         </p:nvSpPr>
         <p:spPr>
           <a:xfrm>
-            <a:off x="2194560" y="6446520"/>
-            <a:ext cx="5943600" cy="274320"/>
-          </a:xfrm>
-          <a:prstGeom prst="rect">
-            <a:avLst/>
-          </a:prstGeom>
-          <a:noFill/>
-        </p:spPr>
-        <p:txBody>
-          <a:bodyPr wrap="square" anchor="t" lIns="0" rIns="0" tIns="0" bIns="0">
-            <a:spAutoFit/>
-          </a:bodyPr>
-          <a:lstStyle/>
-          <a:p>
-            <a:pPr algn="l"/>
-            <a:r>
-              <a:rPr sz="1000" b="1" i="0">
-                <a:solidFill>
-                  <a:srgbClr val="8F989D"/>
-                </a:solidFill>
-                <a:latin typeface="Calibri"/>
-              </a:rPr>
-              <a:t>Inicio 5:10 pm</a:t>
-            </a:r>
-          </a:p>
-        </p:txBody>
-      </p:sp>
-      <p:sp>
-        <p:nvSpPr>
-          <p:cNvPr id="6" name="TextBox 5"/>
-          <p:cNvSpPr txBox="1"/>
-          <p:nvPr/>
-        </p:nvSpPr>
-        <p:spPr>
-          <a:xfrm>
             <a:off x="11094415" y="6446520"/>
             <a:ext cx="548640" cy="274320"/>
           </a:xfrm>
@@ -8174,7 +7754,7 @@
       </p:sp>
       <p:sp>
         <p:nvSpPr>
-          <p:cNvPr id="7" name="TextBox 6"/>
+          <p:cNvPr id="6" name="TextBox 5"/>
           <p:cNvSpPr txBox="1"/>
           <p:nvPr/>
         </p:nvSpPr>
@@ -8614,41 +8194,6 @@
         </p:nvSpPr>
         <p:spPr>
           <a:xfrm>
-            <a:off x="2194560" y="6446520"/>
-            <a:ext cx="5943600" cy="274320"/>
-          </a:xfrm>
-          <a:prstGeom prst="rect">
-            <a:avLst/>
-          </a:prstGeom>
-          <a:noFill/>
-        </p:spPr>
-        <p:txBody>
-          <a:bodyPr wrap="square" anchor="t" lIns="0" rIns="0" tIns="0" bIns="0">
-            <a:spAutoFit/>
-          </a:bodyPr>
-          <a:lstStyle/>
-          <a:p>
-            <a:pPr algn="l"/>
-            <a:r>
-              <a:rPr sz="1000" b="1" i="0">
-                <a:solidFill>
-                  <a:srgbClr val="8F989D"/>
-                </a:solidFill>
-                <a:latin typeface="Calibri"/>
-              </a:rPr>
-              <a:t>Inicio 5:10 pm</a:t>
-            </a:r>
-          </a:p>
-        </p:txBody>
-      </p:sp>
-      <p:sp>
-        <p:nvSpPr>
-          <p:cNvPr id="6" name="TextBox 5"/>
-          <p:cNvSpPr txBox="1"/>
-          <p:nvPr/>
-        </p:nvSpPr>
-        <p:spPr>
-          <a:xfrm>
             <a:off x="11094415" y="6446520"/>
             <a:ext cx="548640" cy="274320"/>
           </a:xfrm>
@@ -8895,41 +8440,6 @@
           </a:p>
         </p:txBody>
       </p:sp>
-      <p:sp>
-        <p:nvSpPr>
-          <p:cNvPr id="7" name="TextBox 6"/>
-          <p:cNvSpPr txBox="1"/>
-          <p:nvPr/>
-        </p:nvSpPr>
-        <p:spPr>
-          <a:xfrm>
-            <a:off x="2194560" y="6446520"/>
-            <a:ext cx="5943600" cy="274320"/>
-          </a:xfrm>
-          <a:prstGeom prst="rect">
-            <a:avLst/>
-          </a:prstGeom>
-          <a:noFill/>
-        </p:spPr>
-        <p:txBody>
-          <a:bodyPr wrap="square" anchor="t" lIns="0" rIns="0" tIns="0" bIns="0">
-            <a:spAutoFit/>
-          </a:bodyPr>
-          <a:lstStyle/>
-          <a:p>
-            <a:pPr algn="l"/>
-            <a:r>
-              <a:rPr sz="1000" b="1" i="0">
-                <a:solidFill>
-                  <a:srgbClr val="8F989D"/>
-                </a:solidFill>
-                <a:latin typeface="Calibri"/>
-              </a:rPr>
-              <a:t>Inicio 5:10 pm</a:t>
-            </a:r>
-          </a:p>
-        </p:txBody>
-      </p:sp>
     </p:spTree>
   </p:cSld>
   <p:clrMapOvr>
@@ -9277,41 +8787,6 @@
       <p:sp>
         <p:nvSpPr>
           <p:cNvPr id="5" name="TextBox 4"/>
-          <p:cNvSpPr txBox="1"/>
-          <p:nvPr/>
-        </p:nvSpPr>
-        <p:spPr>
-          <a:xfrm>
-            <a:off x="2194560" y="6446520"/>
-            <a:ext cx="5943600" cy="274320"/>
-          </a:xfrm>
-          <a:prstGeom prst="rect">
-            <a:avLst/>
-          </a:prstGeom>
-          <a:noFill/>
-        </p:spPr>
-        <p:txBody>
-          <a:bodyPr wrap="square" anchor="t" lIns="0" rIns="0" tIns="0" bIns="0">
-            <a:spAutoFit/>
-          </a:bodyPr>
-          <a:lstStyle/>
-          <a:p>
-            <a:pPr algn="l"/>
-            <a:r>
-              <a:rPr sz="1000" b="1" i="0">
-                <a:solidFill>
-                  <a:srgbClr val="8F989D"/>
-                </a:solidFill>
-                <a:latin typeface="Calibri"/>
-              </a:rPr>
-              <a:t>Inicio 5:10 pm</a:t>
-            </a:r>
-          </a:p>
-        </p:txBody>
-      </p:sp>
-      <p:sp>
-        <p:nvSpPr>
-          <p:cNvPr id="6" name="TextBox 5"/>
           <p:cNvSpPr txBox="1"/>
           <p:nvPr/>
         </p:nvSpPr>
@@ -10016,41 +9491,6 @@
         </p:nvSpPr>
         <p:spPr>
           <a:xfrm>
-            <a:off x="2194560" y="6446520"/>
-            <a:ext cx="5943600" cy="274320"/>
-          </a:xfrm>
-          <a:prstGeom prst="rect">
-            <a:avLst/>
-          </a:prstGeom>
-          <a:noFill/>
-        </p:spPr>
-        <p:txBody>
-          <a:bodyPr wrap="square" anchor="t" lIns="0" rIns="0" tIns="0" bIns="0">
-            <a:spAutoFit/>
-          </a:bodyPr>
-          <a:lstStyle/>
-          <a:p>
-            <a:pPr algn="l"/>
-            <a:r>
-              <a:rPr sz="1000" b="1" i="0">
-                <a:solidFill>
-                  <a:srgbClr val="8F989D"/>
-                </a:solidFill>
-                <a:latin typeface="Calibri"/>
-              </a:rPr>
-              <a:t>Inicio 5:10 pm</a:t>
-            </a:r>
-          </a:p>
-        </p:txBody>
-      </p:sp>
-      <p:sp>
-        <p:nvSpPr>
-          <p:cNvPr id="7" name="TextBox 6"/>
-          <p:cNvSpPr txBox="1"/>
-          <p:nvPr/>
-        </p:nvSpPr>
-        <p:spPr>
-          <a:xfrm>
             <a:off x="11094415" y="6446520"/>
             <a:ext cx="548640" cy="274320"/>
           </a:xfrm>
@@ -10484,41 +9924,6 @@
         </p:nvSpPr>
         <p:spPr>
           <a:xfrm>
-            <a:off x="2194560" y="6446520"/>
-            <a:ext cx="5943600" cy="274320"/>
-          </a:xfrm>
-          <a:prstGeom prst="rect">
-            <a:avLst/>
-          </a:prstGeom>
-          <a:noFill/>
-        </p:spPr>
-        <p:txBody>
-          <a:bodyPr wrap="square" anchor="t" lIns="0" rIns="0" tIns="0" bIns="0">
-            <a:spAutoFit/>
-          </a:bodyPr>
-          <a:lstStyle/>
-          <a:p>
-            <a:pPr algn="l"/>
-            <a:r>
-              <a:rPr sz="1000" b="1" i="0">
-                <a:solidFill>
-                  <a:srgbClr val="8F989D"/>
-                </a:solidFill>
-                <a:latin typeface="Calibri"/>
-              </a:rPr>
-              <a:t>Inicio 5:10 pm</a:t>
-            </a:r>
-          </a:p>
-        </p:txBody>
-      </p:sp>
-      <p:sp>
-        <p:nvSpPr>
-          <p:cNvPr id="6" name="TextBox 5"/>
-          <p:cNvSpPr txBox="1"/>
-          <p:nvPr/>
-        </p:nvSpPr>
-        <p:spPr>
-          <a:xfrm>
             <a:off x="11094415" y="6446520"/>
             <a:ext cx="548640" cy="274320"/>
           </a:xfrm>
@@ -10916,41 +10321,6 @@
         </p:nvSpPr>
         <p:spPr>
           <a:xfrm>
-            <a:off x="2194560" y="6446520"/>
-            <a:ext cx="5943600" cy="274320"/>
-          </a:xfrm>
-          <a:prstGeom prst="rect">
-            <a:avLst/>
-          </a:prstGeom>
-          <a:noFill/>
-        </p:spPr>
-        <p:txBody>
-          <a:bodyPr wrap="square" anchor="t" lIns="0" rIns="0" tIns="0" bIns="0">
-            <a:spAutoFit/>
-          </a:bodyPr>
-          <a:lstStyle/>
-          <a:p>
-            <a:pPr algn="l"/>
-            <a:r>
-              <a:rPr sz="1000" b="1" i="0">
-                <a:solidFill>
-                  <a:srgbClr val="8F989D"/>
-                </a:solidFill>
-                <a:latin typeface="Calibri"/>
-              </a:rPr>
-              <a:t>Inicio 5:10 pm</a:t>
-            </a:r>
-          </a:p>
-        </p:txBody>
-      </p:sp>
-      <p:sp>
-        <p:nvSpPr>
-          <p:cNvPr id="6" name="TextBox 5"/>
-          <p:cNvSpPr txBox="1"/>
-          <p:nvPr/>
-        </p:nvSpPr>
-        <p:spPr>
-          <a:xfrm>
             <a:off x="11094415" y="6446520"/>
             <a:ext cx="548640" cy="274320"/>
           </a:xfrm>
@@ -11130,41 +10500,6 @@
         </p:nvSpPr>
         <p:spPr>
           <a:xfrm>
-            <a:off x="2194560" y="6446520"/>
-            <a:ext cx="5943600" cy="274320"/>
-          </a:xfrm>
-          <a:prstGeom prst="rect">
-            <a:avLst/>
-          </a:prstGeom>
-          <a:noFill/>
-        </p:spPr>
-        <p:txBody>
-          <a:bodyPr wrap="square" anchor="t" lIns="0" rIns="0" tIns="0" bIns="0">
-            <a:spAutoFit/>
-          </a:bodyPr>
-          <a:lstStyle/>
-          <a:p>
-            <a:pPr algn="l"/>
-            <a:r>
-              <a:rPr sz="1000" b="1" i="0">
-                <a:solidFill>
-                  <a:srgbClr val="8F989D"/>
-                </a:solidFill>
-                <a:latin typeface="Calibri"/>
-              </a:rPr>
-              <a:t>Inicio 5:10 pm</a:t>
-            </a:r>
-          </a:p>
-        </p:txBody>
-      </p:sp>
-      <p:sp>
-        <p:nvSpPr>
-          <p:cNvPr id="6" name="TextBox 5"/>
-          <p:cNvSpPr txBox="1"/>
-          <p:nvPr/>
-        </p:nvSpPr>
-        <p:spPr>
-          <a:xfrm>
             <a:off x="11094415" y="6446520"/>
             <a:ext cx="548640" cy="274320"/>
           </a:xfrm>
@@ -11541,41 +10876,6 @@
       <p:sp>
         <p:nvSpPr>
           <p:cNvPr id="5" name="TextBox 4"/>
-          <p:cNvSpPr txBox="1"/>
-          <p:nvPr/>
-        </p:nvSpPr>
-        <p:spPr>
-          <a:xfrm>
-            <a:off x="2194560" y="6446520"/>
-            <a:ext cx="5943600" cy="274320"/>
-          </a:xfrm>
-          <a:prstGeom prst="rect">
-            <a:avLst/>
-          </a:prstGeom>
-          <a:noFill/>
-        </p:spPr>
-        <p:txBody>
-          <a:bodyPr wrap="square" anchor="t" lIns="0" rIns="0" tIns="0" bIns="0">
-            <a:spAutoFit/>
-          </a:bodyPr>
-          <a:lstStyle/>
-          <a:p>
-            <a:pPr algn="l"/>
-            <a:r>
-              <a:rPr sz="1000" b="1" i="0">
-                <a:solidFill>
-                  <a:srgbClr val="8F989D"/>
-                </a:solidFill>
-                <a:latin typeface="Calibri"/>
-              </a:rPr>
-              <a:t>Inicio 5:10 pm</a:t>
-            </a:r>
-          </a:p>
-        </p:txBody>
-      </p:sp>
-      <p:sp>
-        <p:nvSpPr>
-          <p:cNvPr id="6" name="TextBox 5"/>
           <p:cNvSpPr txBox="1"/>
           <p:nvPr/>
         </p:nvSpPr>
@@ -12270,41 +11570,6 @@
         </p:nvSpPr>
         <p:spPr>
           <a:xfrm>
-            <a:off x="2194560" y="6446520"/>
-            <a:ext cx="5943600" cy="274320"/>
-          </a:xfrm>
-          <a:prstGeom prst="rect">
-            <a:avLst/>
-          </a:prstGeom>
-          <a:noFill/>
-        </p:spPr>
-        <p:txBody>
-          <a:bodyPr wrap="square" anchor="t" lIns="0" rIns="0" tIns="0" bIns="0">
-            <a:spAutoFit/>
-          </a:bodyPr>
-          <a:lstStyle/>
-          <a:p>
-            <a:pPr algn="l"/>
-            <a:r>
-              <a:rPr sz="1000" b="1" i="0">
-                <a:solidFill>
-                  <a:srgbClr val="8F989D"/>
-                </a:solidFill>
-                <a:latin typeface="Calibri"/>
-              </a:rPr>
-              <a:t>Inicio 5:10 pm</a:t>
-            </a:r>
-          </a:p>
-        </p:txBody>
-      </p:sp>
-      <p:sp>
-        <p:nvSpPr>
-          <p:cNvPr id="7" name="TextBox 6"/>
-          <p:cNvSpPr txBox="1"/>
-          <p:nvPr/>
-        </p:nvSpPr>
-        <p:spPr>
-          <a:xfrm>
             <a:off x="11094415" y="6446520"/>
             <a:ext cx="548640" cy="274320"/>
           </a:xfrm>

--- a/Pregrado/Investigacion en ciencia y tecnologia/Clases/Sesion 03 - Prueba parcial · 1.er avance del artículo/Presentacion.pptx
+++ b/Pregrado/Investigacion en ciencia y tecnologia/Clases/Sesion 03 - Prueba parcial · 1.er avance del artículo/Presentacion.pptx
@@ -26,6 +26,7 @@
     <p:sldId id="274" r:id="rId25"/>
     <p:sldId id="275" r:id="rId26"/>
     <p:sldId id="276" r:id="rId27"/>
+    <p:sldId id="277" r:id="rId28"/>
   </p:sldIdLst>
   <p:sldSz cx="12191695" cy="6858000" type="screen4x3"/>
   <p:notesSz cx="6858000" cy="9144000"/>
@@ -8079,7 +8080,7 @@
                 </a:solidFill>
                 <a:latin typeface="Calibri"/>
               </a:rPr>
-              <a:t>–   La próxima sesión trabajamos el </a:t>
+              <a:t>–   </a:t>
             </a:r>
             <a:r>
               <a:rPr sz="1600" b="1" i="0">
@@ -8088,6 +8089,24 @@
                 </a:solidFill>
                 <a:latin typeface="Calibri"/>
               </a:rPr>
+              <a:t>La próxima sesión es doble:</a:t>
+            </a:r>
+            <a:r>
+              <a:rPr sz="1600" b="0" i="0">
+                <a:solidFill>
+                  <a:srgbClr val="2B2B2B"/>
+                </a:solidFill>
+                <a:latin typeface="Calibri"/>
+              </a:rPr>
+              <a:t> el </a:t>
+            </a:r>
+            <a:r>
+              <a:rPr sz="1600" b="1" i="0">
+                <a:solidFill>
+                  <a:srgbClr val="2B2B2B"/>
+                </a:solidFill>
+                <a:latin typeface="Calibri"/>
+              </a:rPr>
               <a:t>corazón del artículo</a:t>
             </a:r>
             <a:r>
@@ -8097,7 +8116,43 @@
                 </a:solidFill>
                 <a:latin typeface="Calibri"/>
               </a:rPr>
-              <a:t>: identificar el problema y formular la pregunta.</a:t>
+              <a:t> —identificar el problema y formular la pregunta— y, en la segunda mitad, </a:t>
+            </a:r>
+            <a:r>
+              <a:rPr sz="1600" b="1" i="0">
+                <a:solidFill>
+                  <a:srgbClr val="2B2B2B"/>
+                </a:solidFill>
+                <a:latin typeface="Calibri"/>
+              </a:rPr>
+              <a:t>dónde se buscan las fuentes</a:t>
+            </a:r>
+            <a:r>
+              <a:rPr sz="1600" b="0" i="0">
+                <a:solidFill>
+                  <a:srgbClr val="2B2B2B"/>
+                </a:solidFill>
+                <a:latin typeface="Calibri"/>
+              </a:rPr>
+              <a:t> (Scholar, SciELO, Redalyc, biblioteca CUN) y </a:t>
+            </a:r>
+            <a:r>
+              <a:rPr sz="1600" b="1" i="0">
+                <a:solidFill>
+                  <a:srgbClr val="2B2B2B"/>
+                </a:solidFill>
+                <a:latin typeface="Calibri"/>
+              </a:rPr>
+              <a:t>cómo se citan</a:t>
+            </a:r>
+            <a:r>
+              <a:rPr sz="1600" b="0" i="0">
+                <a:solidFill>
+                  <a:srgbClr val="2B2B2B"/>
+                </a:solidFill>
+                <a:latin typeface="Calibri"/>
+              </a:rPr>
+              <a:t> en APA 7.</a:t>
             </a:r>
           </a:p>
           <a:p>
@@ -8113,7 +8168,7 @@
                 </a:solidFill>
                 <a:latin typeface="Calibri"/>
               </a:rPr>
-              <a:t>●   Traiga su avance: vamos a </a:t>
+              <a:t>●   Se adelantó la búsqueda de fuentes porque el </a:t>
             </a:r>
             <a:r>
               <a:rPr sz="1500" b="1" i="0">
@@ -8122,7 +8177,7 @@
                 </a:solidFill>
                 <a:latin typeface="Calibri"/>
               </a:rPr>
-              <a:t>someter su pregunta a prueba</a:t>
+              <a:t>artículo que se califica</a:t>
             </a:r>
             <a:r>
               <a:rPr sz="1500" b="0" i="0">
@@ -8131,7 +8186,7 @@
                 </a:solidFill>
                 <a:latin typeface="Calibri"/>
               </a:rPr>
-              <a:t> con espina de pescado y árbol de problemas.</a:t>
+              <a:t> las exige: no se puede llegar al final del periodo sin saber buscar.</a:t>
             </a:r>
           </a:p>
           <a:p>
@@ -8147,41 +8202,75 @@
                 </a:solidFill>
                 <a:latin typeface="Calibri"/>
               </a:rPr>
-              <a:t>●   Si su pregunta cambia la próxima sesión, no es un fracaso: es exactamente para lo que sirve el avance.</a:t>
-            </a:r>
-          </a:p>
-          <a:p>
-            <a:pPr>
+              <a:t>●   Traiga su avance: vamos a </a:t>
+            </a:r>
+            <a:r>
+              <a:rPr sz="1500" b="1" i="0">
+                <a:solidFill>
+                  <a:srgbClr val="2B2B2B"/>
+                </a:solidFill>
+                <a:latin typeface="Calibri"/>
+              </a:rPr>
+              <a:t>someter su pregunta a prueba</a:t>
+            </a:r>
+            <a:r>
+              <a:rPr sz="1500" b="0" i="0">
+                <a:solidFill>
+                  <a:srgbClr val="2B2B2B"/>
+                </a:solidFill>
+                <a:latin typeface="Calibri"/>
+              </a:rPr>
+              <a:t> con espina de pescado y árbol de problemas.</a:t>
+            </a:r>
+          </a:p>
+          <a:p>
+            <a:pPr lvl="1">
               <a:spcAft>
-                <a:spcPts val="1000"/>
+                <a:spcPts val="600"/>
               </a:spcAft>
             </a:pPr>
             <a:r>
-              <a:rPr sz="1600" b="0" i="0">
-                <a:solidFill>
-                  <a:srgbClr val="2B2B2B"/>
-                </a:solidFill>
-                <a:latin typeface="Calibri"/>
-              </a:rPr>
-              <a:t>–   Todo el material y las entregas viven en </a:t>
-            </a:r>
-            <a:r>
-              <a:rPr sz="1600" b="1" i="0">
-                <a:solidFill>
-                  <a:srgbClr val="2B2B2B"/>
-                </a:solidFill>
-                <a:latin typeface="Calibri"/>
-              </a:rPr>
-              <a:t>CDigital</a:t>
-            </a:r>
-            <a:r>
-              <a:rPr sz="1600" b="0" i="0">
-                <a:solidFill>
-                  <a:srgbClr val="2B2B2B"/>
-                </a:solidFill>
-                <a:latin typeface="Calibri"/>
-              </a:rPr>
-              <a:t>: [URL CDigital — campus del curso pendiente]</a:t>
+              <a:rPr sz="1500" b="0" i="0">
+                <a:solidFill>
+                  <a:srgbClr val="2B2B2B"/>
+                </a:solidFill>
+                <a:latin typeface="Calibri"/>
+              </a:rPr>
+              <a:t>●   Si su pregunta cambia la próxima sesión, no es un fracaso: es exactamente para lo que sirve el avance.</a:t>
+            </a:r>
+          </a:p>
+          <a:p>
+            <a:pPr lvl="1">
+              <a:spcAft>
+                <a:spcPts val="600"/>
+              </a:spcAft>
+            </a:pPr>
+            <a:r>
+              <a:rPr sz="1500" b="0" i="0">
+                <a:solidFill>
+                  <a:srgbClr val="2B2B2B"/>
+                </a:solidFill>
+                <a:latin typeface="Calibri"/>
+              </a:rPr>
+              <a:t>●   Tenga a mano su </a:t>
+            </a:r>
+            <a:r>
+              <a:rPr sz="1500" b="1" i="0">
+                <a:solidFill>
+                  <a:srgbClr val="2B2B2B"/>
+                </a:solidFill>
+                <a:latin typeface="Calibri"/>
+              </a:rPr>
+              <a:t>login institucional</a:t>
+            </a:r>
+            <a:r>
+              <a:rPr sz="1500" b="0" i="0">
+                <a:solidFill>
+                  <a:srgbClr val="2B2B2B"/>
+                </a:solidFill>
+                <a:latin typeface="Calibri"/>
+              </a:rPr>
+              <a:t> de la biblioteca CUN: se usa en clase.</a:t>
             </a:r>
           </a:p>
         </p:txBody>
@@ -8230,6 +8319,203 @@
 </file>
 
 <file path=ppt/slides/slide21.xml><?xml version="1.0" encoding="utf-8"?>
+<p:sld xmlns:a="http://schemas.openxmlformats.org/drawingml/2006/main" xmlns:p="http://schemas.openxmlformats.org/presentationml/2006/main" xmlns:r="http://schemas.openxmlformats.org/officeDocument/2006/relationships">
+  <p:cSld>
+    <p:bg>
+      <p:bgPr>
+        <a:solidFill>
+          <a:srgbClr val="FFFFFF"/>
+        </a:solidFill>
+        <a:effectLst/>
+      </p:bgPr>
+    </p:bg>
+    <p:spTree>
+      <p:nvGrpSpPr>
+        <p:cNvPr id="1" name=""/>
+        <p:cNvGrpSpPr/>
+        <p:nvPr/>
+      </p:nvGrpSpPr>
+      <p:grpSpPr/>
+      <p:sp>
+        <p:nvSpPr>
+          <p:cNvPr id="2" name="Rectangle 1"/>
+          <p:cNvSpPr/>
+          <p:nvPr/>
+        </p:nvSpPr>
+        <p:spPr>
+          <a:xfrm>
+            <a:off x="0" y="0"/>
+            <a:ext cx="12191695" cy="1188720"/>
+          </a:xfrm>
+          <a:prstGeom prst="rect">
+            <a:avLst/>
+          </a:prstGeom>
+          <a:solidFill>
+            <a:srgbClr val="0C2340"/>
+          </a:solidFill>
+          <a:ln>
+            <a:noFill/>
+          </a:ln>
+          <a:effectLst/>
+        </p:spPr>
+        <p:style>
+          <a:lnRef idx="1">
+            <a:schemeClr val="accent1"/>
+          </a:lnRef>
+          <a:fillRef idx="3">
+            <a:schemeClr val="accent1"/>
+          </a:fillRef>
+          <a:effectRef idx="2">
+            <a:schemeClr val="accent1"/>
+          </a:effectRef>
+          <a:fontRef idx="minor">
+            <a:schemeClr val="lt1"/>
+          </a:fontRef>
+        </p:style>
+        <p:txBody>
+          <a:bodyPr rtlCol="0" anchor="ctr"/>
+          <a:lstStyle/>
+          <a:p>
+            <a:pPr algn="ctr"/>
+          </a:p>
+        </p:txBody>
+      </p:sp>
+      <p:sp>
+        <p:nvSpPr>
+          <p:cNvPr id="3" name="TextBox 2"/>
+          <p:cNvSpPr txBox="1"/>
+          <p:nvPr/>
+        </p:nvSpPr>
+        <p:spPr>
+          <a:xfrm>
+            <a:off x="640080" y="0"/>
+            <a:ext cx="9082735" cy="1188720"/>
+          </a:xfrm>
+          <a:prstGeom prst="rect">
+            <a:avLst/>
+          </a:prstGeom>
+          <a:noFill/>
+        </p:spPr>
+        <p:txBody>
+          <a:bodyPr wrap="square" anchor="ctr" lIns="0" rIns="0" tIns="0" bIns="0">
+            <a:spAutoFit/>
+          </a:bodyPr>
+          <a:lstStyle/>
+          <a:p>
+            <a:pPr algn="ctr"/>
+            <a:r>
+              <a:rPr sz="2600" b="1" i="0">
+                <a:solidFill>
+                  <a:srgbClr val="FFFFFF"/>
+                </a:solidFill>
+                <a:latin typeface="Calibri"/>
+              </a:rPr>
+              <a:t>Trabajo autónomo · para la próxima sesión (cont.)</a:t>
+            </a:r>
+          </a:p>
+        </p:txBody>
+      </p:sp>
+      <p:sp>
+        <p:nvSpPr>
+          <p:cNvPr id="4" name="TextBox 3"/>
+          <p:cNvSpPr txBox="1"/>
+          <p:nvPr/>
+        </p:nvSpPr>
+        <p:spPr>
+          <a:xfrm>
+            <a:off x="640080" y="1691639"/>
+            <a:ext cx="10911535" cy="4617720"/>
+          </a:xfrm>
+          <a:prstGeom prst="rect">
+            <a:avLst/>
+          </a:prstGeom>
+          <a:noFill/>
+        </p:spPr>
+        <p:txBody>
+          <a:bodyPr wrap="square" anchor="t" lIns="0" rIns="0" tIns="0" bIns="0">
+            <a:spAutoFit/>
+          </a:bodyPr>
+          <a:lstStyle/>
+          <a:p>
+            <a:pPr>
+              <a:spcAft>
+                <a:spcPts val="1000"/>
+              </a:spcAft>
+            </a:pPr>
+            <a:r>
+              <a:rPr sz="1600" b="0" i="0">
+                <a:solidFill>
+                  <a:srgbClr val="2B2B2B"/>
+                </a:solidFill>
+                <a:latin typeface="Calibri"/>
+              </a:rPr>
+              <a:t>–   Todo el material y las entregas viven en </a:t>
+            </a:r>
+            <a:r>
+              <a:rPr sz="1600" b="1" i="0">
+                <a:solidFill>
+                  <a:srgbClr val="2B2B2B"/>
+                </a:solidFill>
+                <a:latin typeface="Calibri"/>
+              </a:rPr>
+              <a:t>CDigital</a:t>
+            </a:r>
+            <a:r>
+              <a:rPr sz="1600" b="0" i="0">
+                <a:solidFill>
+                  <a:srgbClr val="2B2B2B"/>
+                </a:solidFill>
+                <a:latin typeface="Calibri"/>
+              </a:rPr>
+              <a:t>: [URL CDigital — campus del curso pendiente]</a:t>
+            </a:r>
+          </a:p>
+        </p:txBody>
+      </p:sp>
+      <p:sp>
+        <p:nvSpPr>
+          <p:cNvPr id="5" name="TextBox 4"/>
+          <p:cNvSpPr txBox="1"/>
+          <p:nvPr/>
+        </p:nvSpPr>
+        <p:spPr>
+          <a:xfrm>
+            <a:off x="11094415" y="6446520"/>
+            <a:ext cx="548640" cy="274320"/>
+          </a:xfrm>
+          <a:prstGeom prst="rect">
+            <a:avLst/>
+          </a:prstGeom>
+          <a:noFill/>
+        </p:spPr>
+        <p:txBody>
+          <a:bodyPr wrap="square" anchor="t" lIns="0" rIns="0" tIns="0" bIns="0">
+            <a:spAutoFit/>
+          </a:bodyPr>
+          <a:lstStyle/>
+          <a:p>
+            <a:pPr algn="r"/>
+            <a:r>
+              <a:rPr sz="1000" b="1" i="0">
+                <a:solidFill>
+                  <a:srgbClr val="8F989D"/>
+                </a:solidFill>
+                <a:latin typeface="Calibri"/>
+              </a:rPr>
+              <a:t>21</a:t>
+            </a:r>
+          </a:p>
+        </p:txBody>
+      </p:sp>
+    </p:spTree>
+  </p:cSld>
+  <p:clrMapOvr>
+    <a:masterClrMapping/>
+  </p:clrMapOvr>
+</p:sld>
+</file>
+
+<file path=ppt/slides/slide22.xml><?xml version="1.0" encoding="utf-8"?>
 <p:sld xmlns:a="http://schemas.openxmlformats.org/drawingml/2006/main" xmlns:p="http://schemas.openxmlformats.org/presentationml/2006/main" xmlns:r="http://schemas.openxmlformats.org/officeDocument/2006/relationships">
   <p:cSld>
     <p:bg>

--- a/Pregrado/Investigacion en ciencia y tecnologia/Clases/Sesion 03 - Prueba parcial · 1.er avance del artículo/Presentacion.pptx
+++ b/Pregrado/Investigacion en ciencia y tecnologia/Clases/Sesion 03 - Prueba parcial · 1.er avance del artículo/Presentacion.pptx
@@ -27,6 +27,8 @@
     <p:sldId id="275" r:id="rId26"/>
     <p:sldId id="276" r:id="rId27"/>
     <p:sldId id="277" r:id="rId28"/>
+    <p:sldId id="278" r:id="rId29"/>
+    <p:sldId id="279" r:id="rId30"/>
   </p:sldIdLst>
   <p:sldSz cx="12191695" cy="6858000" type="screen4x3"/>
   <p:notesSz cx="6858000" cy="9144000"/>
@@ -5337,7 +5339,7 @@
                 </a:solidFill>
                 <a:latin typeface="Calibri"/>
               </a:rPr>
-              <a:t>: [URL CDigital — campus del curso pendiente]</a:t>
+              <a:t>: https://cdigital.cun.edu.co/course/view.php?id=111070</a:t>
             </a:r>
           </a:p>
         </p:txBody>
@@ -6321,7 +6323,7 @@
                 </a:solidFill>
                 <a:latin typeface="Calibri"/>
               </a:rPr>
-              <a:t>TALLER · Escribir el 1.er avance (~22 min)</a:t>
+              <a:t>TALLER · Escribir el 1.er avance</a:t>
             </a:r>
           </a:p>
         </p:txBody>
@@ -6334,8 +6336,8 @@
         </p:nvSpPr>
         <p:spPr>
           <a:xfrm>
-            <a:off x="640080" y="1691639"/>
-            <a:ext cx="10911535" cy="4617720"/>
+            <a:off x="640080" y="1280160"/>
+            <a:ext cx="10911535" cy="411480"/>
           </a:xfrm>
           <a:prstGeom prst="rect">
             <a:avLst/>
@@ -6348,6 +6350,41 @@
           </a:bodyPr>
           <a:lstStyle/>
           <a:p>
+            <a:pPr algn="ctr"/>
+            <a:r>
+              <a:rPr sz="1500" b="0" i="0">
+                <a:solidFill>
+                  <a:srgbClr val="2B2B2B"/>
+                </a:solidFill>
+                <a:latin typeface="Calibri"/>
+              </a:rPr>
+              <a:t>Individual · el Docente pasa acompañando · se prefiere media página impecable a tres de relleno</a:t>
+            </a:r>
+          </a:p>
+        </p:txBody>
+      </p:sp>
+      <p:sp>
+        <p:nvSpPr>
+          <p:cNvPr id="5" name="TextBox 4"/>
+          <p:cNvSpPr txBox="1"/>
+          <p:nvPr/>
+        </p:nvSpPr>
+        <p:spPr>
+          <a:xfrm>
+            <a:off x="640080" y="2011679"/>
+            <a:ext cx="10911535" cy="4297680"/>
+          </a:xfrm>
+          <a:prstGeom prst="rect">
+            <a:avLst/>
+          </a:prstGeom>
+          <a:noFill/>
+        </p:spPr>
+        <p:txBody>
+          <a:bodyPr wrap="square" anchor="t" lIns="0" rIns="0" tIns="0" bIns="0">
+            <a:spAutoFit/>
+          </a:bodyPr>
+          <a:lstStyle/>
+          <a:p>
             <a:pPr>
               <a:spcAft>
                 <a:spcPts val="1000"/>
@@ -6369,7 +6406,7 @@
                 </a:solidFill>
                 <a:latin typeface="Calibri"/>
               </a:rPr>
-              <a:t>Consigna literal.</a:t>
+              <a:t>Al final tiene:</a:t>
             </a:r>
             <a:r>
               <a:rPr sz="1600" b="0" i="0">
@@ -6378,161 +6415,7 @@
                 </a:solidFill>
                 <a:latin typeface="Calibri"/>
               </a:rPr>
-              <a:t> En un documento llamado `S03_Avance1_Apellido` escriba las cuatro piezas:</a:t>
-            </a:r>
-          </a:p>
-          <a:p>
-            <a:pPr lvl="1">
-              <a:spcAft>
-                <a:spcPts val="600"/>
-              </a:spcAft>
-            </a:pPr>
-            <a:r>
-              <a:rPr sz="1500" b="0" i="0">
-                <a:solidFill>
-                  <a:srgbClr val="2B2B2B"/>
-                </a:solidFill>
-                <a:latin typeface="Calibri"/>
-              </a:rPr>
-              <a:t>●   </a:t>
-            </a:r>
-            <a:r>
-              <a:rPr sz="1500" b="1" i="0">
-                <a:solidFill>
-                  <a:srgbClr val="2B2B2B"/>
-                </a:solidFill>
-                <a:latin typeface="Calibri"/>
-              </a:rPr>
-              <a:t>(1) Título tentativo</a:t>
-            </a:r>
-            <a:r>
-              <a:rPr sz="1500" b="0" i="0">
-                <a:solidFill>
-                  <a:srgbClr val="2B2B2B"/>
-                </a:solidFill>
-                <a:latin typeface="Calibri"/>
-              </a:rPr>
-              <a:t> con actor + fenómeno + contexto, en 20 palabras o menos.</a:t>
-            </a:r>
-          </a:p>
-          <a:p>
-            <a:pPr lvl="1">
-              <a:spcAft>
-                <a:spcPts val="600"/>
-              </a:spcAft>
-            </a:pPr>
-            <a:r>
-              <a:rPr sz="1500" b="0" i="0">
-                <a:solidFill>
-                  <a:srgbClr val="2B2B2B"/>
-                </a:solidFill>
-                <a:latin typeface="Calibri"/>
-              </a:rPr>
-              <a:t>●   </a:t>
-            </a:r>
-            <a:r>
-              <a:rPr sz="1500" b="1" i="0">
-                <a:solidFill>
-                  <a:srgbClr val="2B2B2B"/>
-                </a:solidFill>
-                <a:latin typeface="Calibri"/>
-              </a:rPr>
-              <a:t>(2) Introducción</a:t>
-            </a:r>
-            <a:r>
-              <a:rPr sz="1500" b="0" i="0">
-                <a:solidFill>
-                  <a:srgbClr val="2B2B2B"/>
-                </a:solidFill>
-                <a:latin typeface="Calibri"/>
-              </a:rPr>
-              <a:t> de exactamente </a:t>
-            </a:r>
-            <a:r>
-              <a:rPr sz="1500" b="1" i="0">
-                <a:solidFill>
-                  <a:srgbClr val="2B2B2B"/>
-                </a:solidFill>
-                <a:latin typeface="Calibri"/>
-              </a:rPr>
-              <a:t>3 párrafos</a:t>
-            </a:r>
-            <a:r>
-              <a:rPr sz="1500" b="0" i="0">
-                <a:solidFill>
-                  <a:srgbClr val="2B2B2B"/>
-                </a:solidFill>
-                <a:latin typeface="Calibri"/>
-              </a:rPr>
-              <a:t>: contexto → vacío → propósito.</a:t>
-            </a:r>
-          </a:p>
-          <a:p>
-            <a:pPr lvl="1">
-              <a:spcAft>
-                <a:spcPts val="600"/>
-              </a:spcAft>
-            </a:pPr>
-            <a:r>
-              <a:rPr sz="1500" b="0" i="0">
-                <a:solidFill>
-                  <a:srgbClr val="2B2B2B"/>
-                </a:solidFill>
-                <a:latin typeface="Calibri"/>
-              </a:rPr>
-              <a:t>●   </a:t>
-            </a:r>
-            <a:r>
-              <a:rPr sz="1500" b="1" i="0">
-                <a:solidFill>
-                  <a:srgbClr val="2B2B2B"/>
-                </a:solidFill>
-                <a:latin typeface="Calibri"/>
-              </a:rPr>
-              <a:t>(3) El problema convertido en pregunta</a:t>
-            </a:r>
-            <a:r>
-              <a:rPr sz="1500" b="0" i="0">
-                <a:solidFill>
-                  <a:srgbClr val="2B2B2B"/>
-                </a:solidFill>
-                <a:latin typeface="Calibri"/>
-              </a:rPr>
-              <a:t>, en una sola frase, que no se responda con sí o no.</a:t>
-            </a:r>
-          </a:p>
-          <a:p>
-            <a:pPr lvl="1">
-              <a:spcAft>
-                <a:spcPts val="600"/>
-              </a:spcAft>
-            </a:pPr>
-            <a:r>
-              <a:rPr sz="1500" b="0" i="0">
-                <a:solidFill>
-                  <a:srgbClr val="2B2B2B"/>
-                </a:solidFill>
-                <a:latin typeface="Calibri"/>
-              </a:rPr>
-              <a:t>●   </a:t>
-            </a:r>
-            <a:r>
-              <a:rPr sz="1500" b="1" i="0">
-                <a:solidFill>
-                  <a:srgbClr val="2B2B2B"/>
-                </a:solidFill>
-                <a:latin typeface="Calibri"/>
-              </a:rPr>
-              <a:t>(4) Dos referencias en APA 7</a:t>
-            </a:r>
-            <a:r>
-              <a:rPr sz="1500" b="0" i="0">
-                <a:solidFill>
-                  <a:srgbClr val="2B2B2B"/>
-                </a:solidFill>
-                <a:latin typeface="Calibri"/>
-              </a:rPr>
-              <a:t> generadas con ZoteroBib, de fuentes que usted abrió.</a:t>
+              <a:t> título tentativo, introducción de 3 párrafos, la pregunta y dos referencias en APA 7.</a:t>
             </a:r>
           </a:p>
           <a:p>
@@ -6557,7 +6440,7 @@
                 </a:solidFill>
                 <a:latin typeface="Calibri"/>
               </a:rPr>
-              <a:t>Tiempo:</a:t>
+              <a:t>Paso 1</a:t>
             </a:r>
             <a:r>
               <a:rPr sz="1600" b="0" i="0">
@@ -6566,7 +6449,25 @@
                 </a:solidFill>
                 <a:latin typeface="Calibri"/>
               </a:rPr>
-              <a:t> ~22 minutos. Escriba primero y corrija después: no se quede puliendo la primera frase.</a:t>
+              <a:t> · </a:t>
+            </a:r>
+            <a:r>
+              <a:rPr sz="1600" b="1" i="0">
+                <a:solidFill>
+                  <a:srgbClr val="2B2B2B"/>
+                </a:solidFill>
+                <a:latin typeface="Calibri"/>
+              </a:rPr>
+              <a:t>Título tentativo</a:t>
+            </a:r>
+            <a:r>
+              <a:rPr sz="1600" b="0" i="0">
+                <a:solidFill>
+                  <a:srgbClr val="2B2B2B"/>
+                </a:solidFill>
+                <a:latin typeface="Calibri"/>
+              </a:rPr>
+              <a:t> con actor + fenómeno + contexto, en 20 palabras o menos.</a:t>
             </a:r>
           </a:p>
           <a:p>
@@ -6591,7 +6492,7 @@
                 </a:solidFill>
                 <a:latin typeface="Calibri"/>
               </a:rPr>
-              <a:t>Criterio de éxito (verificable):</a:t>
+              <a:t>Paso 2</a:t>
             </a:r>
             <a:r>
               <a:rPr sz="1600" b="0" i="0">
@@ -6600,7 +6501,7 @@
                 </a:solidFill>
                 <a:latin typeface="Calibri"/>
               </a:rPr>
-              <a:t> si otra persona lee su introducción </a:t>
+              <a:t> · </a:t>
             </a:r>
             <a:r>
               <a:rPr sz="1600" b="1" i="0">
@@ -6609,7 +6510,7 @@
                 </a:solidFill>
                 <a:latin typeface="Calibri"/>
               </a:rPr>
-              <a:t>sin conocer su tema</a:t>
+              <a:t>Introducción</a:t>
             </a:r>
             <a:r>
               <a:rPr sz="1600" b="0" i="0">
@@ -6618,7 +6519,25 @@
                 </a:solidFill>
                 <a:latin typeface="Calibri"/>
               </a:rPr>
-              <a:t>, puede decirle cuál es el contexto, cuál es el vacío y qué se propone usted.</a:t>
+              <a:t> de exactamente </a:t>
+            </a:r>
+            <a:r>
+              <a:rPr sz="1600" b="1" i="0">
+                <a:solidFill>
+                  <a:srgbClr val="2B2B2B"/>
+                </a:solidFill>
+                <a:latin typeface="Calibri"/>
+              </a:rPr>
+              <a:t>3 párrafos</a:t>
+            </a:r>
+            <a:r>
+              <a:rPr sz="1600" b="0" i="0">
+                <a:solidFill>
+                  <a:srgbClr val="2B2B2B"/>
+                </a:solidFill>
+                <a:latin typeface="Calibri"/>
+              </a:rPr>
+              <a:t>: contexto → vacío → propósito.</a:t>
             </a:r>
           </a:p>
           <a:p>
@@ -6634,7 +6553,7 @@
                 </a:solidFill>
                 <a:latin typeface="Calibri"/>
               </a:rPr>
-              <a:t>–   Prueba de control: subraye el vacío. Si no puede subrayarlo, </a:t>
+              <a:t>–   </a:t>
             </a:r>
             <a:r>
               <a:rPr sz="1600" b="1" i="0">
@@ -6643,7 +6562,7 @@
                 </a:solidFill>
                 <a:latin typeface="Calibri"/>
               </a:rPr>
-              <a:t>no lo escribió</a:t>
+              <a:t>Paso 3</a:t>
             </a:r>
             <a:r>
               <a:rPr sz="1600" b="0" i="0">
@@ -6652,7 +6571,25 @@
                 </a:solidFill>
                 <a:latin typeface="Calibri"/>
               </a:rPr>
-              <a:t>.</a:t>
+              <a:t> · </a:t>
+            </a:r>
+            <a:r>
+              <a:rPr sz="1600" b="1" i="0">
+                <a:solidFill>
+                  <a:srgbClr val="2B2B2B"/>
+                </a:solidFill>
+                <a:latin typeface="Calibri"/>
+              </a:rPr>
+              <a:t>El problema convertido en pregunta</a:t>
+            </a:r>
+            <a:r>
+              <a:rPr sz="1600" b="0" i="0">
+                <a:solidFill>
+                  <a:srgbClr val="2B2B2B"/>
+                </a:solidFill>
+                <a:latin typeface="Calibri"/>
+              </a:rPr>
+              <a:t>, en una sola frase, que no se responda con sí o no.</a:t>
             </a:r>
           </a:p>
           <a:p>
@@ -6668,7 +6605,7 @@
                 </a:solidFill>
                 <a:latin typeface="Calibri"/>
               </a:rPr>
-              <a:t>–   Se prefiere </a:t>
+              <a:t>–   </a:t>
             </a:r>
             <a:r>
               <a:rPr sz="1600" b="1" i="0">
@@ -6677,7 +6614,7 @@
                 </a:solidFill>
                 <a:latin typeface="Calibri"/>
               </a:rPr>
-              <a:t>media página impecable a tres páginas de relleno</a:t>
+              <a:t>Paso 4</a:t>
             </a:r>
             <a:r>
               <a:rPr sz="1600" b="0" i="0">
@@ -6686,14 +6623,84 @@
                 </a:solidFill>
                 <a:latin typeface="Calibri"/>
               </a:rPr>
-              <a:t>.</a:t>
-            </a:r>
-          </a:p>
-        </p:txBody>
-      </p:sp>
-      <p:sp>
-        <p:nvSpPr>
-          <p:cNvPr id="5" name="TextBox 4"/>
+              <a:t> · </a:t>
+            </a:r>
+            <a:r>
+              <a:rPr sz="1600" b="1" i="0">
+                <a:solidFill>
+                  <a:srgbClr val="2B2B2B"/>
+                </a:solidFill>
+                <a:latin typeface="Calibri"/>
+              </a:rPr>
+              <a:t>Dos referencias en APA 7</a:t>
+            </a:r>
+            <a:r>
+              <a:rPr sz="1600" b="0" i="0">
+                <a:solidFill>
+                  <a:srgbClr val="2B2B2B"/>
+                </a:solidFill>
+                <a:latin typeface="Calibri"/>
+              </a:rPr>
+              <a:t> generadas con ZoteroBib, de fuentes que usted abrió.</a:t>
+            </a:r>
+          </a:p>
+          <a:p>
+            <a:pPr>
+              <a:spcAft>
+                <a:spcPts val="1000"/>
+              </a:spcAft>
+            </a:pPr>
+            <a:r>
+              <a:rPr sz="1600" b="0" i="0">
+                <a:solidFill>
+                  <a:srgbClr val="2B2B2B"/>
+                </a:solidFill>
+                <a:latin typeface="Calibri"/>
+              </a:rPr>
+              <a:t>–   </a:t>
+            </a:r>
+            <a:r>
+              <a:rPr sz="1600" b="1" i="0">
+                <a:solidFill>
+                  <a:srgbClr val="2B2B2B"/>
+                </a:solidFill>
+                <a:latin typeface="Calibri"/>
+              </a:rPr>
+              <a:t>En clase, sin falta:</a:t>
+            </a:r>
+            <a:r>
+              <a:rPr sz="1600" b="0" i="0">
+                <a:solidFill>
+                  <a:srgbClr val="2B2B2B"/>
+                </a:solidFill>
+                <a:latin typeface="Calibri"/>
+              </a:rPr>
+              <a:t> los </a:t>
+            </a:r>
+            <a:r>
+              <a:rPr sz="1600" b="1" i="0">
+                <a:solidFill>
+                  <a:srgbClr val="2B2B2B"/>
+                </a:solidFill>
+                <a:latin typeface="Calibri"/>
+              </a:rPr>
+              <a:t>pasos 1 a 2</a:t>
+            </a:r>
+            <a:r>
+              <a:rPr sz="1600" b="0" i="0">
+                <a:solidFill>
+                  <a:srgbClr val="2B2B2B"/>
+                </a:solidFill>
+                <a:latin typeface="Calibri"/>
+              </a:rPr>
+              <a:t>. Del 3 en adelante puede quedar en trabajo autónomo, pero antes de la próxima sesión.</a:t>
+            </a:r>
+          </a:p>
+        </p:txBody>
+      </p:sp>
+      <p:sp>
+        <p:nvSpPr>
+          <p:cNvPr id="6" name="TextBox 5"/>
           <p:cNvSpPr txBox="1"/>
           <p:nvPr/>
         </p:nvSpPr>
@@ -6826,7 +6833,7 @@
                 </a:solidFill>
                 <a:latin typeface="Calibri"/>
               </a:rPr>
-              <a:t>Checklist antes de subir su entrega</a:t>
+              <a:t>TALLER · cómo se revisa y dónde se entrega</a:t>
             </a:r>
           </a:p>
         </p:txBody>
@@ -6839,8 +6846,8 @@
         </p:nvSpPr>
         <p:spPr>
           <a:xfrm>
-            <a:off x="640080" y="1691639"/>
-            <a:ext cx="10911535" cy="4617720"/>
+            <a:off x="640080" y="1280160"/>
+            <a:ext cx="10911535" cy="411480"/>
           </a:xfrm>
           <a:prstGeom prst="rect">
             <a:avLst/>
@@ -6853,6 +6860,41 @@
           </a:bodyPr>
           <a:lstStyle/>
           <a:p>
+            <a:pPr algn="ctr"/>
+            <a:r>
+              <a:rPr sz="1500" b="0" i="0">
+                <a:solidFill>
+                  <a:srgbClr val="2B2B2B"/>
+                </a:solidFill>
+                <a:latin typeface="Calibri"/>
+              </a:rPr>
+              <a:t>Escribir el 1.er avance</a:t>
+            </a:r>
+          </a:p>
+        </p:txBody>
+      </p:sp>
+      <p:sp>
+        <p:nvSpPr>
+          <p:cNvPr id="5" name="TextBox 4"/>
+          <p:cNvSpPr txBox="1"/>
+          <p:nvPr/>
+        </p:nvSpPr>
+        <p:spPr>
+          <a:xfrm>
+            <a:off x="640080" y="2011679"/>
+            <a:ext cx="10911535" cy="4297680"/>
+          </a:xfrm>
+          <a:prstGeom prst="rect">
+            <a:avLst/>
+          </a:prstGeom>
+          <a:noFill/>
+        </p:spPr>
+        <p:txBody>
+          <a:bodyPr wrap="square" anchor="t" lIns="0" rIns="0" tIns="0" bIns="0">
+            <a:spAutoFit/>
+          </a:bodyPr>
+          <a:lstStyle/>
+          <a:p>
             <a:pPr>
               <a:spcAft>
                 <a:spcPts val="1000"/>
@@ -6865,7 +6907,109 @@
                 </a:solidFill>
                 <a:latin typeface="Calibri"/>
               </a:rPr>
-              <a:t>–   [ ] El documento se llama `S03_Avance1_Apellido`.</a:t>
+              <a:t>–   </a:t>
+            </a:r>
+            <a:r>
+              <a:rPr sz="1600" b="1" i="0">
+                <a:solidFill>
+                  <a:srgbClr val="2B2B2B"/>
+                </a:solidFill>
+                <a:latin typeface="Calibri"/>
+              </a:rPr>
+              <a:t>Quedó bien si</a:t>
+            </a:r>
+            <a:r>
+              <a:rPr sz="1600" b="0" i="0">
+                <a:solidFill>
+                  <a:srgbClr val="2B2B2B"/>
+                </a:solidFill>
+                <a:latin typeface="Calibri"/>
+              </a:rPr>
+              <a:t> —compruébelo usted antes de cerrar el documento—:</a:t>
+            </a:r>
+          </a:p>
+          <a:p>
+            <a:pPr lvl="1">
+              <a:spcAft>
+                <a:spcPts val="600"/>
+              </a:spcAft>
+            </a:pPr>
+            <a:r>
+              <a:rPr sz="1500" b="0" i="0">
+                <a:solidFill>
+                  <a:srgbClr val="2B2B2B"/>
+                </a:solidFill>
+                <a:latin typeface="Calibri"/>
+              </a:rPr>
+              <a:t>●   Otra persona lee su introducción </a:t>
+            </a:r>
+            <a:r>
+              <a:rPr sz="1500" b="1" i="0">
+                <a:solidFill>
+                  <a:srgbClr val="2B2B2B"/>
+                </a:solidFill>
+                <a:latin typeface="Calibri"/>
+              </a:rPr>
+              <a:t>sin conocer su tema</a:t>
+            </a:r>
+            <a:r>
+              <a:rPr sz="1500" b="0" i="0">
+                <a:solidFill>
+                  <a:srgbClr val="2B2B2B"/>
+                </a:solidFill>
+                <a:latin typeface="Calibri"/>
+              </a:rPr>
+              <a:t> y le dice cuál es el contexto, cuál el vacío y qué se propone usted.</a:t>
+            </a:r>
+          </a:p>
+          <a:p>
+            <a:pPr lvl="1">
+              <a:spcAft>
+                <a:spcPts val="600"/>
+              </a:spcAft>
+            </a:pPr>
+            <a:r>
+              <a:rPr sz="1500" b="0" i="0">
+                <a:solidFill>
+                  <a:srgbClr val="2B2B2B"/>
+                </a:solidFill>
+                <a:latin typeface="Calibri"/>
+              </a:rPr>
+              <a:t>●   Puede </a:t>
+            </a:r>
+            <a:r>
+              <a:rPr sz="1500" b="1" i="0">
+                <a:solidFill>
+                  <a:srgbClr val="2B2B2B"/>
+                </a:solidFill>
+                <a:latin typeface="Calibri"/>
+              </a:rPr>
+              <a:t>subrayar el vacío</a:t>
+            </a:r>
+            <a:r>
+              <a:rPr sz="1500" b="0" i="0">
+                <a:solidFill>
+                  <a:srgbClr val="2B2B2B"/>
+                </a:solidFill>
+                <a:latin typeface="Calibri"/>
+              </a:rPr>
+              <a:t>: si no puede subrayarlo, no lo escribió.</a:t>
+            </a:r>
+          </a:p>
+          <a:p>
+            <a:pPr lvl="1">
+              <a:spcAft>
+                <a:spcPts val="600"/>
+              </a:spcAft>
+            </a:pPr>
+            <a:r>
+              <a:rPr sz="1500" b="0" i="0">
+                <a:solidFill>
+                  <a:srgbClr val="2B2B2B"/>
+                </a:solidFill>
+                <a:latin typeface="Calibri"/>
+              </a:rPr>
+              <a:t>●   La pregunta no se contesta con sí o no.</a:t>
             </a:r>
           </a:p>
           <a:p>
@@ -6881,7 +7025,25 @@
                 </a:solidFill>
                 <a:latin typeface="Calibri"/>
               </a:rPr>
-              <a:t>–   [ ] Mi título tiene actor, fenómeno y contexto, y no pasa de 20 palabras.</a:t>
+              <a:t>–   </a:t>
+            </a:r>
+            <a:r>
+              <a:rPr sz="1600" b="1" i="0">
+                <a:solidFill>
+                  <a:srgbClr val="2B2B2B"/>
+                </a:solidFill>
+                <a:latin typeface="Calibri"/>
+              </a:rPr>
+              <a:t>Plan B:</a:t>
+            </a:r>
+            <a:r>
+              <a:rPr sz="1600" b="0" i="0">
+                <a:solidFill>
+                  <a:srgbClr val="2B2B2B"/>
+                </a:solidFill>
+                <a:latin typeface="Calibri"/>
+              </a:rPr>
+              <a:t> Escriba primero y corrija después: no se quede puliendo la primera frase. Si la introducción no arranca, empiece por el párrafo del propósito, que ya lo tiene claro.</a:t>
             </a:r>
           </a:p>
           <a:p>
@@ -6897,7 +7059,7 @@
                 </a:solidFill>
                 <a:latin typeface="Calibri"/>
               </a:rPr>
-              <a:t>–   [ ] Mi introducción tiene </a:t>
+              <a:t>–   </a:t>
             </a:r>
             <a:r>
               <a:rPr sz="1600" b="1" i="0">
@@ -6906,7 +7068,7 @@
                 </a:solidFill>
                 <a:latin typeface="Calibri"/>
               </a:rPr>
-              <a:t>3 párrafos</a:t>
+              <a:t>Hoy no se sube nada al aula:</a:t>
             </a:r>
             <a:r>
               <a:rPr sz="1600" b="0" i="0">
@@ -6915,7 +7077,25 @@
                 </a:solidFill>
                 <a:latin typeface="Calibri"/>
               </a:rPr>
-              <a:t>, no uno largo ni cinco cortos.</a:t>
+              <a:t> guarde `S03_Avance1_Apellido` (Google Doc o PDF) en su Drive y tráigalo a la próxima sesión. Es un </a:t>
+            </a:r>
+            <a:r>
+              <a:rPr sz="1600" b="1" i="0">
+                <a:solidFill>
+                  <a:srgbClr val="2B2B2B"/>
+                </a:solidFill>
+                <a:latin typeface="Calibri"/>
+              </a:rPr>
+              <a:t>avance formativo</a:t>
+            </a:r>
+            <a:r>
+              <a:rPr sz="1600" b="0" i="0">
+                <a:solidFill>
+                  <a:srgbClr val="2B2B2B"/>
+                </a:solidFill>
+                <a:latin typeface="Calibri"/>
+              </a:rPr>
+              <a:t>, se revisa en clase.</a:t>
             </a:r>
           </a:p>
           <a:p>
@@ -6931,7 +7111,7 @@
                 </a:solidFill>
                 <a:latin typeface="Calibri"/>
               </a:rPr>
-              <a:t>–   [ ] El párrafo 2 tiene un giro ("sin embargo", "no obstante") y </a:t>
+              <a:t>–   </a:t>
             </a:r>
             <a:r>
               <a:rPr sz="1600" b="1" i="0">
@@ -6940,7 +7120,7 @@
                 </a:solidFill>
                 <a:latin typeface="Calibri"/>
               </a:rPr>
-              <a:t>nombra lo que no se sabe</a:t>
+              <a:t>Esto alimenta:</a:t>
             </a:r>
             <a:r>
               <a:rPr sz="1600" b="0" i="0">
@@ -6949,166 +7129,86 @@
                 </a:solidFill>
                 <a:latin typeface="Calibri"/>
               </a:rPr>
+              <a:t> </a:t>
+            </a:r>
+            <a:r>
+              <a:rPr sz="1600" b="1" i="0">
+                <a:solidFill>
+                  <a:srgbClr val="2B2B2B"/>
+                </a:solidFill>
+                <a:latin typeface="Calibri"/>
+              </a:rPr>
+              <a:t>ACA Final</a:t>
+            </a:r>
+            <a:r>
+              <a:rPr sz="1600" b="0" i="0">
+                <a:solidFill>
+                  <a:srgbClr val="2B2B2B"/>
+                </a:solidFill>
+                <a:latin typeface="Calibri"/>
+              </a:rPr>
+              <a:t> —tarea, 32,8%—, el documento que </a:t>
+            </a:r>
+            <a:r>
+              <a:rPr sz="1600" b="1" i="0">
+                <a:solidFill>
+                  <a:srgbClr val="2B2B2B"/>
+                </a:solidFill>
+                <a:latin typeface="Calibri"/>
+              </a:rPr>
+              <a:t>sí</a:t>
+            </a:r>
+            <a:r>
+              <a:rPr sz="1600" b="0" i="0">
+                <a:solidFill>
+                  <a:srgbClr val="2B2B2B"/>
+                </a:solidFill>
+                <a:latin typeface="Calibri"/>
+              </a:rPr>
+              <a:t> recibe </a:t>
+            </a:r>
+            <a:r>
+              <a:rPr sz="1600" b="1" i="0">
+                <a:solidFill>
+                  <a:srgbClr val="2B2B2B"/>
+                </a:solidFill>
+                <a:latin typeface="Calibri"/>
+              </a:rPr>
+              <a:t>CDigital</a:t>
+            </a:r>
+            <a:r>
+              <a:rPr sz="1600" b="0" i="0">
+                <a:solidFill>
+                  <a:srgbClr val="2B2B2B"/>
+                </a:solidFill>
+                <a:latin typeface="Calibri"/>
+              </a:rPr>
+              <a:t>; cierra en la semana de la </a:t>
+            </a:r>
+            <a:r>
+              <a:rPr sz="1600" b="1" i="0">
+                <a:solidFill>
+                  <a:srgbClr val="2B2B2B"/>
+                </a:solidFill>
+                <a:latin typeface="Calibri"/>
+              </a:rPr>
+              <a:t>Sesión 05</a:t>
+            </a:r>
+            <a:r>
+              <a:rPr sz="1600" b="0" i="0">
+                <a:solidFill>
+                  <a:srgbClr val="2B2B2B"/>
+                </a:solidFill>
+                <a:latin typeface="Calibri"/>
+              </a:rPr>
               <a:t>.</a:t>
             </a:r>
           </a:p>
-          <a:p>
-            <a:pPr>
-              <a:spcAft>
-                <a:spcPts val="1000"/>
-              </a:spcAft>
-            </a:pPr>
-            <a:r>
-              <a:rPr sz="1600" b="0" i="0">
-                <a:solidFill>
-                  <a:srgbClr val="2B2B2B"/>
-                </a:solidFill>
-                <a:latin typeface="Calibri"/>
-              </a:rPr>
-              <a:t>–   [ ] El párrafo 3 tiene </a:t>
-            </a:r>
-            <a:r>
-              <a:rPr sz="1600" b="1" i="0">
-                <a:solidFill>
-                  <a:srgbClr val="2B2B2B"/>
-                </a:solidFill>
-                <a:latin typeface="Calibri"/>
-              </a:rPr>
-              <a:t>un</a:t>
-            </a:r>
-            <a:r>
-              <a:rPr sz="1600" b="0" i="0">
-                <a:solidFill>
-                  <a:srgbClr val="2B2B2B"/>
-                </a:solidFill>
-                <a:latin typeface="Calibri"/>
-              </a:rPr>
-              <a:t> verbo de propósito (describir, caracterizar, comparar, evaluar).</a:t>
-            </a:r>
-          </a:p>
-          <a:p>
-            <a:pPr>
-              <a:spcAft>
-                <a:spcPts val="1000"/>
-              </a:spcAft>
-            </a:pPr>
-            <a:r>
-              <a:rPr sz="1600" b="0" i="0">
-                <a:solidFill>
-                  <a:srgbClr val="2B2B2B"/>
-                </a:solidFill>
-                <a:latin typeface="Calibri"/>
-              </a:rPr>
-              <a:t>–   [ ] No empecé con "desde la antigüedad" ni con una definición de diccionario.</a:t>
-            </a:r>
-          </a:p>
-          <a:p>
-            <a:pPr>
-              <a:spcAft>
-                <a:spcPts val="1000"/>
-              </a:spcAft>
-            </a:pPr>
-            <a:r>
-              <a:rPr sz="1600" b="0" i="0">
-                <a:solidFill>
-                  <a:srgbClr val="2B2B2B"/>
-                </a:solidFill>
-                <a:latin typeface="Calibri"/>
-              </a:rPr>
-              <a:t>–   [ ] Mi pregunta empieza por </a:t>
-            </a:r>
-            <a:r>
-              <a:rPr sz="1600" b="1" i="0">
-                <a:solidFill>
-                  <a:srgbClr val="2B2B2B"/>
-                </a:solidFill>
-                <a:latin typeface="Calibri"/>
-              </a:rPr>
-              <a:t>cómo, qué, cuál o en qué medida</a:t>
-            </a:r>
-            <a:r>
-              <a:rPr sz="1600" b="0" i="0">
-                <a:solidFill>
-                  <a:srgbClr val="2B2B2B"/>
-                </a:solidFill>
-                <a:latin typeface="Calibri"/>
-              </a:rPr>
-              <a:t> (no por "¿es...?" o "¿existe...?").</a:t>
-            </a:r>
-          </a:p>
-          <a:p>
-            <a:pPr>
-              <a:spcAft>
-                <a:spcPts val="1000"/>
-              </a:spcAft>
-            </a:pPr>
-            <a:r>
-              <a:rPr sz="1600" b="0" i="0">
-                <a:solidFill>
-                  <a:srgbClr val="2B2B2B"/>
-                </a:solidFill>
-                <a:latin typeface="Calibri"/>
-              </a:rPr>
-              <a:t>–   [ ] Mis 2 referencias son </a:t>
-            </a:r>
-            <a:r>
-              <a:rPr sz="1600" b="1" i="0">
-                <a:solidFill>
-                  <a:srgbClr val="2B2B2B"/>
-                </a:solidFill>
-                <a:latin typeface="Calibri"/>
-              </a:rPr>
-              <a:t>primarias o secundarias</a:t>
-            </a:r>
-            <a:r>
-              <a:rPr sz="1600" b="0" i="0">
-                <a:solidFill>
-                  <a:srgbClr val="2B2B2B"/>
-                </a:solidFill>
-                <a:latin typeface="Calibri"/>
-              </a:rPr>
-              <a:t>, no un blog ni Wikipedia.</a:t>
-            </a:r>
-          </a:p>
-          <a:p>
-            <a:pPr>
-              <a:spcAft>
-                <a:spcPts val="1000"/>
-              </a:spcAft>
-            </a:pPr>
-            <a:r>
-              <a:rPr sz="1600" b="0" i="0">
-                <a:solidFill>
-                  <a:srgbClr val="2B2B2B"/>
-                </a:solidFill>
-                <a:latin typeface="Calibri"/>
-              </a:rPr>
-              <a:t>–   [ ] </a:t>
-            </a:r>
-            <a:r>
-              <a:rPr sz="1600" b="1" i="0">
-                <a:solidFill>
-                  <a:srgbClr val="2B2B2B"/>
-                </a:solidFill>
-                <a:latin typeface="Calibri"/>
-              </a:rPr>
-              <a:t>Abrí</a:t>
-            </a:r>
-            <a:r>
-              <a:rPr sz="1600" b="0" i="0">
-                <a:solidFill>
-                  <a:srgbClr val="2B2B2B"/>
-                </a:solidFill>
-                <a:latin typeface="Calibri"/>
-              </a:rPr>
-              <a:t> los dos documentos que cito: no los tomé del listado de resultados.</a:t>
-            </a:r>
-          </a:p>
-        </p:txBody>
-      </p:sp>
-      <p:sp>
-        <p:nvSpPr>
-          <p:cNvPr id="5" name="TextBox 4"/>
+        </p:txBody>
+      </p:sp>
+      <p:sp>
+        <p:nvSpPr>
+          <p:cNvPr id="6" name="TextBox 5"/>
           <p:cNvSpPr txBox="1"/>
           <p:nvPr/>
         </p:nvSpPr>
@@ -7241,7 +7341,7 @@
                 </a:solidFill>
                 <a:latin typeface="Calibri"/>
               </a:rPr>
-              <a:t>Checklist antes de subir su entrega (cont.)</a:t>
+              <a:t>Checklist antes de subir su entrega</a:t>
             </a:r>
           </a:p>
         </p:txBody>
@@ -7280,7 +7380,7 @@
                 </a:solidFill>
                 <a:latin typeface="Calibri"/>
               </a:rPr>
-              <a:t>–   [ ] Las referencias están en APA 7, en orden alfabético, al final.</a:t>
+              <a:t>–   [ ] El documento se llama `S03_Avance1_Apellido`.</a:t>
             </a:r>
           </a:p>
           <a:p>
@@ -7296,7 +7396,23 @@
                 </a:solidFill>
                 <a:latin typeface="Calibri"/>
               </a:rPr>
-              <a:t>–   [ ] Subí el archivo a </a:t>
+              <a:t>–   [ ] Mi título tiene actor, fenómeno y contexto, y no pasa de 20 palabras.</a:t>
+            </a:r>
+          </a:p>
+          <a:p>
+            <a:pPr>
+              <a:spcAft>
+                <a:spcPts val="1000"/>
+              </a:spcAft>
+            </a:pPr>
+            <a:r>
+              <a:rPr sz="1600" b="0" i="0">
+                <a:solidFill>
+                  <a:srgbClr val="2B2B2B"/>
+                </a:solidFill>
+                <a:latin typeface="Calibri"/>
+              </a:rPr>
+              <a:t>–   [ ] Mi introducción tiene </a:t>
             </a:r>
             <a:r>
               <a:rPr sz="1600" b="1" i="0">
@@ -7305,7 +7421,7 @@
                 </a:solidFill>
                 <a:latin typeface="Calibri"/>
               </a:rPr>
-              <a:t>CDigital</a:t>
+              <a:t>3 párrafos</a:t>
             </a:r>
             <a:r>
               <a:rPr sz="1600" b="0" i="0">
@@ -7314,7 +7430,193 @@
                 </a:solidFill>
                 <a:latin typeface="Calibri"/>
               </a:rPr>
-              <a:t>: [URL CDigital — campus del curso pendiente]</a:t>
+              <a:t>, no uno largo ni cinco cortos.</a:t>
+            </a:r>
+          </a:p>
+          <a:p>
+            <a:pPr>
+              <a:spcAft>
+                <a:spcPts val="1000"/>
+              </a:spcAft>
+            </a:pPr>
+            <a:r>
+              <a:rPr sz="1600" b="0" i="0">
+                <a:solidFill>
+                  <a:srgbClr val="2B2B2B"/>
+                </a:solidFill>
+                <a:latin typeface="Calibri"/>
+              </a:rPr>
+              <a:t>–   [ ] El párrafo 2 tiene un giro ("sin embargo", "no obstante") y </a:t>
+            </a:r>
+            <a:r>
+              <a:rPr sz="1600" b="1" i="0">
+                <a:solidFill>
+                  <a:srgbClr val="2B2B2B"/>
+                </a:solidFill>
+                <a:latin typeface="Calibri"/>
+              </a:rPr>
+              <a:t>nombra lo que no se sabe</a:t>
+            </a:r>
+            <a:r>
+              <a:rPr sz="1600" b="0" i="0">
+                <a:solidFill>
+                  <a:srgbClr val="2B2B2B"/>
+                </a:solidFill>
+                <a:latin typeface="Calibri"/>
+              </a:rPr>
+              <a:t>.</a:t>
+            </a:r>
+          </a:p>
+          <a:p>
+            <a:pPr>
+              <a:spcAft>
+                <a:spcPts val="1000"/>
+              </a:spcAft>
+            </a:pPr>
+            <a:r>
+              <a:rPr sz="1600" b="0" i="0">
+                <a:solidFill>
+                  <a:srgbClr val="2B2B2B"/>
+                </a:solidFill>
+                <a:latin typeface="Calibri"/>
+              </a:rPr>
+              <a:t>–   [ ] El párrafo 3 tiene </a:t>
+            </a:r>
+            <a:r>
+              <a:rPr sz="1600" b="1" i="0">
+                <a:solidFill>
+                  <a:srgbClr val="2B2B2B"/>
+                </a:solidFill>
+                <a:latin typeface="Calibri"/>
+              </a:rPr>
+              <a:t>un</a:t>
+            </a:r>
+            <a:r>
+              <a:rPr sz="1600" b="0" i="0">
+                <a:solidFill>
+                  <a:srgbClr val="2B2B2B"/>
+                </a:solidFill>
+                <a:latin typeface="Calibri"/>
+              </a:rPr>
+              <a:t> verbo de propósito (describir, caracterizar, comparar, evaluar).</a:t>
+            </a:r>
+          </a:p>
+          <a:p>
+            <a:pPr>
+              <a:spcAft>
+                <a:spcPts val="1000"/>
+              </a:spcAft>
+            </a:pPr>
+            <a:r>
+              <a:rPr sz="1600" b="0" i="0">
+                <a:solidFill>
+                  <a:srgbClr val="2B2B2B"/>
+                </a:solidFill>
+                <a:latin typeface="Calibri"/>
+              </a:rPr>
+              <a:t>–   [ ] No empecé con "desde la antigüedad" ni con una definición de diccionario.</a:t>
+            </a:r>
+          </a:p>
+          <a:p>
+            <a:pPr>
+              <a:spcAft>
+                <a:spcPts val="1000"/>
+              </a:spcAft>
+            </a:pPr>
+            <a:r>
+              <a:rPr sz="1600" b="0" i="0">
+                <a:solidFill>
+                  <a:srgbClr val="2B2B2B"/>
+                </a:solidFill>
+                <a:latin typeface="Calibri"/>
+              </a:rPr>
+              <a:t>–   [ ] Mi pregunta empieza por </a:t>
+            </a:r>
+            <a:r>
+              <a:rPr sz="1600" b="1" i="0">
+                <a:solidFill>
+                  <a:srgbClr val="2B2B2B"/>
+                </a:solidFill>
+                <a:latin typeface="Calibri"/>
+              </a:rPr>
+              <a:t>cómo, qué, cuál o en qué medida</a:t>
+            </a:r>
+            <a:r>
+              <a:rPr sz="1600" b="0" i="0">
+                <a:solidFill>
+                  <a:srgbClr val="2B2B2B"/>
+                </a:solidFill>
+                <a:latin typeface="Calibri"/>
+              </a:rPr>
+              <a:t> (no por "¿es...?" o "¿existe...?").</a:t>
+            </a:r>
+          </a:p>
+          <a:p>
+            <a:pPr>
+              <a:spcAft>
+                <a:spcPts val="1000"/>
+              </a:spcAft>
+            </a:pPr>
+            <a:r>
+              <a:rPr sz="1600" b="0" i="0">
+                <a:solidFill>
+                  <a:srgbClr val="2B2B2B"/>
+                </a:solidFill>
+                <a:latin typeface="Calibri"/>
+              </a:rPr>
+              <a:t>–   [ ] Mis 2 referencias son </a:t>
+            </a:r>
+            <a:r>
+              <a:rPr sz="1600" b="1" i="0">
+                <a:solidFill>
+                  <a:srgbClr val="2B2B2B"/>
+                </a:solidFill>
+                <a:latin typeface="Calibri"/>
+              </a:rPr>
+              <a:t>primarias o secundarias</a:t>
+            </a:r>
+            <a:r>
+              <a:rPr sz="1600" b="0" i="0">
+                <a:solidFill>
+                  <a:srgbClr val="2B2B2B"/>
+                </a:solidFill>
+                <a:latin typeface="Calibri"/>
+              </a:rPr>
+              <a:t>, no un blog ni Wikipedia.</a:t>
+            </a:r>
+          </a:p>
+          <a:p>
+            <a:pPr>
+              <a:spcAft>
+                <a:spcPts val="1000"/>
+              </a:spcAft>
+            </a:pPr>
+            <a:r>
+              <a:rPr sz="1600" b="0" i="0">
+                <a:solidFill>
+                  <a:srgbClr val="2B2B2B"/>
+                </a:solidFill>
+                <a:latin typeface="Calibri"/>
+              </a:rPr>
+              <a:t>–   [ ] </a:t>
+            </a:r>
+            <a:r>
+              <a:rPr sz="1600" b="1" i="0">
+                <a:solidFill>
+                  <a:srgbClr val="2B2B2B"/>
+                </a:solidFill>
+                <a:latin typeface="Calibri"/>
+              </a:rPr>
+              <a:t>Abrí</a:t>
+            </a:r>
+            <a:r>
+              <a:rPr sz="1600" b="0" i="0">
+                <a:solidFill>
+                  <a:srgbClr val="2B2B2B"/>
+                </a:solidFill>
+                <a:latin typeface="Calibri"/>
+              </a:rPr>
+              <a:t> los dos documentos que cito: no los tomé del listado de resultados.</a:t>
             </a:r>
           </a:p>
         </p:txBody>
@@ -7923,7 +8225,7 @@
                 </a:solidFill>
                 <a:latin typeface="Calibri"/>
               </a:rPr>
-              <a:t>Trabajo autónomo · para la próxima sesión</a:t>
+              <a:t>Checklist antes de subir su entrega (cont.)</a:t>
             </a:r>
           </a:p>
         </p:txBody>
@@ -7962,25 +8264,7 @@
                 </a:solidFill>
                 <a:latin typeface="Calibri"/>
               </a:rPr>
-              <a:t>–   </a:t>
-            </a:r>
-            <a:r>
-              <a:rPr sz="1600" b="1" i="0">
-                <a:solidFill>
-                  <a:srgbClr val="2B2B2B"/>
-                </a:solidFill>
-                <a:latin typeface="Calibri"/>
-              </a:rPr>
-              <a:t>Relea su avance en voz alta.</a:t>
-            </a:r>
-            <a:r>
-              <a:rPr sz="1600" b="0" i="0">
-                <a:solidFill>
-                  <a:srgbClr val="2B2B2B"/>
-                </a:solidFill>
-                <a:latin typeface="Calibri"/>
-              </a:rPr>
-              <a:t> Lo que no se puede leer de corrido, está mal escrito.</a:t>
+              <a:t>–   [ ] Las referencias están en APA 7, en orden alfabético, al final.</a:t>
             </a:r>
           </a:p>
           <a:p>
@@ -7996,7 +8280,7 @@
                 </a:solidFill>
                 <a:latin typeface="Calibri"/>
               </a:rPr>
-              <a:t>–   </a:t>
+              <a:t>–   [ ] Subí el archivo a </a:t>
             </a:r>
             <a:r>
               <a:rPr sz="1600" b="1" i="0">
@@ -8005,7 +8289,7 @@
                 </a:solidFill>
                 <a:latin typeface="Calibri"/>
               </a:rPr>
-              <a:t>Repase para el parcial</a:t>
+              <a:t>CDigital</a:t>
             </a:r>
             <a:r>
               <a:rPr sz="1600" b="0" i="0">
@@ -8014,263 +8298,7 @@
                 </a:solidFill>
                 <a:latin typeface="Calibri"/>
               </a:rPr>
-              <a:t> con las dos tablas de hoy: tipos de conocimiento y tipos de fuente.</a:t>
-            </a:r>
-          </a:p>
-          <a:p>
-            <a:pPr lvl="1">
-              <a:spcAft>
-                <a:spcPts val="600"/>
-              </a:spcAft>
-            </a:pPr>
-            <a:r>
-              <a:rPr sz="1500" b="0" i="0">
-                <a:solidFill>
-                  <a:srgbClr val="2B2B2B"/>
-                </a:solidFill>
-                <a:latin typeface="Calibri"/>
-              </a:rPr>
-              <a:t>●   Ejercicio de 10 minutos: tome 5 fuentes cualesquiera y clasifíquelas en primaria/secundaria/terciaria.</a:t>
-            </a:r>
-          </a:p>
-          <a:p>
-            <a:pPr>
-              <a:spcAft>
-                <a:spcPts val="1000"/>
-              </a:spcAft>
-            </a:pPr>
-            <a:r>
-              <a:rPr sz="1600" b="0" i="0">
-                <a:solidFill>
-                  <a:srgbClr val="2B2B2B"/>
-                </a:solidFill>
-                <a:latin typeface="Calibri"/>
-              </a:rPr>
-              <a:t>–   </a:t>
-            </a:r>
-            <a:r>
-              <a:rPr sz="1600" b="1" i="0">
-                <a:solidFill>
-                  <a:srgbClr val="2B2B2B"/>
-                </a:solidFill>
-                <a:latin typeface="Calibri"/>
-              </a:rPr>
-              <a:t>Consulte en CDigital</a:t>
-            </a:r>
-            <a:r>
-              <a:rPr sz="1600" b="0" i="0">
-                <a:solidFill>
-                  <a:srgbClr val="2B2B2B"/>
-                </a:solidFill>
-                <a:latin typeface="Calibri"/>
-              </a:rPr>
-              <a:t> el detalle de la evaluación de este corte y el espacio de entrega.</a:t>
-            </a:r>
-          </a:p>
-          <a:p>
-            <a:pPr>
-              <a:spcAft>
-                <a:spcPts val="1000"/>
-              </a:spcAft>
-            </a:pPr>
-            <a:r>
-              <a:rPr sz="1600" b="0" i="0">
-                <a:solidFill>
-                  <a:srgbClr val="2B2B2B"/>
-                </a:solidFill>
-                <a:latin typeface="Calibri"/>
-              </a:rPr>
-              <a:t>–   </a:t>
-            </a:r>
-            <a:r>
-              <a:rPr sz="1600" b="1" i="0">
-                <a:solidFill>
-                  <a:srgbClr val="2B2B2B"/>
-                </a:solidFill>
-                <a:latin typeface="Calibri"/>
-              </a:rPr>
-              <a:t>La próxima sesión es doble:</a:t>
-            </a:r>
-            <a:r>
-              <a:rPr sz="1600" b="0" i="0">
-                <a:solidFill>
-                  <a:srgbClr val="2B2B2B"/>
-                </a:solidFill>
-                <a:latin typeface="Calibri"/>
-              </a:rPr>
-              <a:t> el </a:t>
-            </a:r>
-            <a:r>
-              <a:rPr sz="1600" b="1" i="0">
-                <a:solidFill>
-                  <a:srgbClr val="2B2B2B"/>
-                </a:solidFill>
-                <a:latin typeface="Calibri"/>
-              </a:rPr>
-              <a:t>corazón del artículo</a:t>
-            </a:r>
-            <a:r>
-              <a:rPr sz="1600" b="0" i="0">
-                <a:solidFill>
-                  <a:srgbClr val="2B2B2B"/>
-                </a:solidFill>
-                <a:latin typeface="Calibri"/>
-              </a:rPr>
-              <a:t> —identificar el problema y formular la pregunta— y, en la segunda mitad, </a:t>
-            </a:r>
-            <a:r>
-              <a:rPr sz="1600" b="1" i="0">
-                <a:solidFill>
-                  <a:srgbClr val="2B2B2B"/>
-                </a:solidFill>
-                <a:latin typeface="Calibri"/>
-              </a:rPr>
-              <a:t>dónde se buscan las fuentes</a:t>
-            </a:r>
-            <a:r>
-              <a:rPr sz="1600" b="0" i="0">
-                <a:solidFill>
-                  <a:srgbClr val="2B2B2B"/>
-                </a:solidFill>
-                <a:latin typeface="Calibri"/>
-              </a:rPr>
-              <a:t> (Scholar, SciELO, Redalyc, biblioteca CUN) y </a:t>
-            </a:r>
-            <a:r>
-              <a:rPr sz="1600" b="1" i="0">
-                <a:solidFill>
-                  <a:srgbClr val="2B2B2B"/>
-                </a:solidFill>
-                <a:latin typeface="Calibri"/>
-              </a:rPr>
-              <a:t>cómo se citan</a:t>
-            </a:r>
-            <a:r>
-              <a:rPr sz="1600" b="0" i="0">
-                <a:solidFill>
-                  <a:srgbClr val="2B2B2B"/>
-                </a:solidFill>
-                <a:latin typeface="Calibri"/>
-              </a:rPr>
-              <a:t> en APA 7.</a:t>
-            </a:r>
-          </a:p>
-          <a:p>
-            <a:pPr lvl="1">
-              <a:spcAft>
-                <a:spcPts val="600"/>
-              </a:spcAft>
-            </a:pPr>
-            <a:r>
-              <a:rPr sz="1500" b="0" i="0">
-                <a:solidFill>
-                  <a:srgbClr val="2B2B2B"/>
-                </a:solidFill>
-                <a:latin typeface="Calibri"/>
-              </a:rPr>
-              <a:t>●   Se adelantó la búsqueda de fuentes porque el </a:t>
-            </a:r>
-            <a:r>
-              <a:rPr sz="1500" b="1" i="0">
-                <a:solidFill>
-                  <a:srgbClr val="2B2B2B"/>
-                </a:solidFill>
-                <a:latin typeface="Calibri"/>
-              </a:rPr>
-              <a:t>artículo que se califica</a:t>
-            </a:r>
-            <a:r>
-              <a:rPr sz="1500" b="0" i="0">
-                <a:solidFill>
-                  <a:srgbClr val="2B2B2B"/>
-                </a:solidFill>
-                <a:latin typeface="Calibri"/>
-              </a:rPr>
-              <a:t> las exige: no se puede llegar al final del periodo sin saber buscar.</a:t>
-            </a:r>
-          </a:p>
-          <a:p>
-            <a:pPr lvl="1">
-              <a:spcAft>
-                <a:spcPts val="600"/>
-              </a:spcAft>
-            </a:pPr>
-            <a:r>
-              <a:rPr sz="1500" b="0" i="0">
-                <a:solidFill>
-                  <a:srgbClr val="2B2B2B"/>
-                </a:solidFill>
-                <a:latin typeface="Calibri"/>
-              </a:rPr>
-              <a:t>●   Traiga su avance: vamos a </a:t>
-            </a:r>
-            <a:r>
-              <a:rPr sz="1500" b="1" i="0">
-                <a:solidFill>
-                  <a:srgbClr val="2B2B2B"/>
-                </a:solidFill>
-                <a:latin typeface="Calibri"/>
-              </a:rPr>
-              <a:t>someter su pregunta a prueba</a:t>
-            </a:r>
-            <a:r>
-              <a:rPr sz="1500" b="0" i="0">
-                <a:solidFill>
-                  <a:srgbClr val="2B2B2B"/>
-                </a:solidFill>
-                <a:latin typeface="Calibri"/>
-              </a:rPr>
-              <a:t> con espina de pescado y árbol de problemas.</a:t>
-            </a:r>
-          </a:p>
-          <a:p>
-            <a:pPr lvl="1">
-              <a:spcAft>
-                <a:spcPts val="600"/>
-              </a:spcAft>
-            </a:pPr>
-            <a:r>
-              <a:rPr sz="1500" b="0" i="0">
-                <a:solidFill>
-                  <a:srgbClr val="2B2B2B"/>
-                </a:solidFill>
-                <a:latin typeface="Calibri"/>
-              </a:rPr>
-              <a:t>●   Si su pregunta cambia la próxima sesión, no es un fracaso: es exactamente para lo que sirve el avance.</a:t>
-            </a:r>
-          </a:p>
-          <a:p>
-            <a:pPr lvl="1">
-              <a:spcAft>
-                <a:spcPts val="600"/>
-              </a:spcAft>
-            </a:pPr>
-            <a:r>
-              <a:rPr sz="1500" b="0" i="0">
-                <a:solidFill>
-                  <a:srgbClr val="2B2B2B"/>
-                </a:solidFill>
-                <a:latin typeface="Calibri"/>
-              </a:rPr>
-              <a:t>●   Tenga a mano su </a:t>
-            </a:r>
-            <a:r>
-              <a:rPr sz="1500" b="1" i="0">
-                <a:solidFill>
-                  <a:srgbClr val="2B2B2B"/>
-                </a:solidFill>
-                <a:latin typeface="Calibri"/>
-              </a:rPr>
-              <a:t>login institucional</a:t>
-            </a:r>
-            <a:r>
-              <a:rPr sz="1500" b="0" i="0">
-                <a:solidFill>
-                  <a:srgbClr val="2B2B2B"/>
-                </a:solidFill>
-                <a:latin typeface="Calibri"/>
-              </a:rPr>
-              <a:t> de la biblioteca CUN: se usa en clase.</a:t>
+              <a:t>: https://cdigital.cun.edu.co/course/view.php?id=111070</a:t>
             </a:r>
           </a:p>
         </p:txBody>
@@ -8410,7 +8438,7 @@
                 </a:solidFill>
                 <a:latin typeface="Calibri"/>
               </a:rPr>
-              <a:t>Trabajo autónomo · para la próxima sesión (cont.)</a:t>
+              <a:t>Trabajo autónomo · para la próxima sesión</a:t>
             </a:r>
           </a:p>
         </p:txBody>
@@ -8449,7 +8477,7 @@
                 </a:solidFill>
                 <a:latin typeface="Calibri"/>
               </a:rPr>
-              <a:t>–   Todo el material y las entregas viven en </a:t>
+              <a:t>–   </a:t>
             </a:r>
             <a:r>
               <a:rPr sz="1600" b="1" i="0">
@@ -8458,7 +8486,7 @@
                 </a:solidFill>
                 <a:latin typeface="Calibri"/>
               </a:rPr>
-              <a:t>CDigital</a:t>
+              <a:t>Relea su avance en voz alta.</a:t>
             </a:r>
             <a:r>
               <a:rPr sz="1600" b="0" i="0">
@@ -8467,7 +8495,297 @@
                 </a:solidFill>
                 <a:latin typeface="Calibri"/>
               </a:rPr>
-              <a:t>: [URL CDigital — campus del curso pendiente]</a:t>
+              <a:t> Lo que no se puede leer de corrido, está mal escrito.</a:t>
+            </a:r>
+          </a:p>
+          <a:p>
+            <a:pPr>
+              <a:spcAft>
+                <a:spcPts val="1000"/>
+              </a:spcAft>
+            </a:pPr>
+            <a:r>
+              <a:rPr sz="1600" b="0" i="0">
+                <a:solidFill>
+                  <a:srgbClr val="2B2B2B"/>
+                </a:solidFill>
+                <a:latin typeface="Calibri"/>
+              </a:rPr>
+              <a:t>–   </a:t>
+            </a:r>
+            <a:r>
+              <a:rPr sz="1600" b="1" i="0">
+                <a:solidFill>
+                  <a:srgbClr val="2B2B2B"/>
+                </a:solidFill>
+                <a:latin typeface="Calibri"/>
+              </a:rPr>
+              <a:t>Repase para el parcial</a:t>
+            </a:r>
+            <a:r>
+              <a:rPr sz="1600" b="0" i="0">
+                <a:solidFill>
+                  <a:srgbClr val="2B2B2B"/>
+                </a:solidFill>
+                <a:latin typeface="Calibri"/>
+              </a:rPr>
+              <a:t> con las dos tablas de hoy: tipos de conocimiento y tipos de fuente.</a:t>
+            </a:r>
+          </a:p>
+          <a:p>
+            <a:pPr lvl="1">
+              <a:spcAft>
+                <a:spcPts val="600"/>
+              </a:spcAft>
+            </a:pPr>
+            <a:r>
+              <a:rPr sz="1500" b="0" i="0">
+                <a:solidFill>
+                  <a:srgbClr val="2B2B2B"/>
+                </a:solidFill>
+                <a:latin typeface="Calibri"/>
+              </a:rPr>
+              <a:t>●   Ejercicio de 10 minutos: tome 5 fuentes cualesquiera y clasifíquelas en primaria/secundaria/terciaria.</a:t>
+            </a:r>
+          </a:p>
+          <a:p>
+            <a:pPr>
+              <a:spcAft>
+                <a:spcPts val="1000"/>
+              </a:spcAft>
+            </a:pPr>
+            <a:r>
+              <a:rPr sz="1600" b="0" i="0">
+                <a:solidFill>
+                  <a:srgbClr val="2B2B2B"/>
+                </a:solidFill>
+                <a:latin typeface="Calibri"/>
+              </a:rPr>
+              <a:t>–   </a:t>
+            </a:r>
+            <a:r>
+              <a:rPr sz="1600" b="1" i="0">
+                <a:solidFill>
+                  <a:srgbClr val="2B2B2B"/>
+                </a:solidFill>
+                <a:latin typeface="Calibri"/>
+              </a:rPr>
+              <a:t>Consulte en CDigital</a:t>
+            </a:r>
+            <a:r>
+              <a:rPr sz="1600" b="0" i="0">
+                <a:solidFill>
+                  <a:srgbClr val="2B2B2B"/>
+                </a:solidFill>
+                <a:latin typeface="Calibri"/>
+              </a:rPr>
+              <a:t> el detalle de la evaluación de este corte y el espacio de entrega.</a:t>
+            </a:r>
+          </a:p>
+          <a:p>
+            <a:pPr>
+              <a:spcAft>
+                <a:spcPts val="1000"/>
+              </a:spcAft>
+            </a:pPr>
+            <a:r>
+              <a:rPr sz="1600" b="0" i="0">
+                <a:solidFill>
+                  <a:srgbClr val="2B2B2B"/>
+                </a:solidFill>
+                <a:latin typeface="Calibri"/>
+              </a:rPr>
+              <a:t>–   </a:t>
+            </a:r>
+            <a:r>
+              <a:rPr sz="1600" b="1" i="0">
+                <a:solidFill>
+                  <a:srgbClr val="2B2B2B"/>
+                </a:solidFill>
+                <a:latin typeface="Calibri"/>
+              </a:rPr>
+              <a:t>La próxima sesión es doble:</a:t>
+            </a:r>
+            <a:r>
+              <a:rPr sz="1600" b="0" i="0">
+                <a:solidFill>
+                  <a:srgbClr val="2B2B2B"/>
+                </a:solidFill>
+                <a:latin typeface="Calibri"/>
+              </a:rPr>
+              <a:t> el </a:t>
+            </a:r>
+            <a:r>
+              <a:rPr sz="1600" b="1" i="0">
+                <a:solidFill>
+                  <a:srgbClr val="2B2B2B"/>
+                </a:solidFill>
+                <a:latin typeface="Calibri"/>
+              </a:rPr>
+              <a:t>corazón del artículo</a:t>
+            </a:r>
+            <a:r>
+              <a:rPr sz="1600" b="0" i="0">
+                <a:solidFill>
+                  <a:srgbClr val="2B2B2B"/>
+                </a:solidFill>
+                <a:latin typeface="Calibri"/>
+              </a:rPr>
+              <a:t> —identificar el problema y formular la pregunta— y, en la segunda mitad, </a:t>
+            </a:r>
+            <a:r>
+              <a:rPr sz="1600" b="1" i="0">
+                <a:solidFill>
+                  <a:srgbClr val="2B2B2B"/>
+                </a:solidFill>
+                <a:latin typeface="Calibri"/>
+              </a:rPr>
+              <a:t>dónde se buscan las fuentes</a:t>
+            </a:r>
+            <a:r>
+              <a:rPr sz="1600" b="0" i="0">
+                <a:solidFill>
+                  <a:srgbClr val="2B2B2B"/>
+                </a:solidFill>
+                <a:latin typeface="Calibri"/>
+              </a:rPr>
+              <a:t> (Scholar, SciELO, Redalyc, biblioteca CUN) y </a:t>
+            </a:r>
+            <a:r>
+              <a:rPr sz="1600" b="1" i="0">
+                <a:solidFill>
+                  <a:srgbClr val="2B2B2B"/>
+                </a:solidFill>
+                <a:latin typeface="Calibri"/>
+              </a:rPr>
+              <a:t>cómo se citan</a:t>
+            </a:r>
+            <a:r>
+              <a:rPr sz="1600" b="0" i="0">
+                <a:solidFill>
+                  <a:srgbClr val="2B2B2B"/>
+                </a:solidFill>
+                <a:latin typeface="Calibri"/>
+              </a:rPr>
+              <a:t> en APA 7.</a:t>
+            </a:r>
+          </a:p>
+          <a:p>
+            <a:pPr lvl="1">
+              <a:spcAft>
+                <a:spcPts val="600"/>
+              </a:spcAft>
+            </a:pPr>
+            <a:r>
+              <a:rPr sz="1500" b="0" i="0">
+                <a:solidFill>
+                  <a:srgbClr val="2B2B2B"/>
+                </a:solidFill>
+                <a:latin typeface="Calibri"/>
+              </a:rPr>
+              <a:t>●   Se adelantó la búsqueda de fuentes porque el </a:t>
+            </a:r>
+            <a:r>
+              <a:rPr sz="1500" b="1" i="0">
+                <a:solidFill>
+                  <a:srgbClr val="2B2B2B"/>
+                </a:solidFill>
+                <a:latin typeface="Calibri"/>
+              </a:rPr>
+              <a:t>artículo que se califica</a:t>
+            </a:r>
+            <a:r>
+              <a:rPr sz="1500" b="0" i="0">
+                <a:solidFill>
+                  <a:srgbClr val="2B2B2B"/>
+                </a:solidFill>
+                <a:latin typeface="Calibri"/>
+              </a:rPr>
+              <a:t> las exige: no se puede llegar al final del periodo sin saber buscar.</a:t>
+            </a:r>
+          </a:p>
+          <a:p>
+            <a:pPr lvl="1">
+              <a:spcAft>
+                <a:spcPts val="600"/>
+              </a:spcAft>
+            </a:pPr>
+            <a:r>
+              <a:rPr sz="1500" b="0" i="0">
+                <a:solidFill>
+                  <a:srgbClr val="2B2B2B"/>
+                </a:solidFill>
+                <a:latin typeface="Calibri"/>
+              </a:rPr>
+              <a:t>●   Traiga su avance: vamos a </a:t>
+            </a:r>
+            <a:r>
+              <a:rPr sz="1500" b="1" i="0">
+                <a:solidFill>
+                  <a:srgbClr val="2B2B2B"/>
+                </a:solidFill>
+                <a:latin typeface="Calibri"/>
+              </a:rPr>
+              <a:t>someter su pregunta a prueba</a:t>
+            </a:r>
+            <a:r>
+              <a:rPr sz="1500" b="0" i="0">
+                <a:solidFill>
+                  <a:srgbClr val="2B2B2B"/>
+                </a:solidFill>
+                <a:latin typeface="Calibri"/>
+              </a:rPr>
+              <a:t> con espina de pescado y árbol de problemas.</a:t>
+            </a:r>
+          </a:p>
+          <a:p>
+            <a:pPr lvl="1">
+              <a:spcAft>
+                <a:spcPts val="600"/>
+              </a:spcAft>
+            </a:pPr>
+            <a:r>
+              <a:rPr sz="1500" b="0" i="0">
+                <a:solidFill>
+                  <a:srgbClr val="2B2B2B"/>
+                </a:solidFill>
+                <a:latin typeface="Calibri"/>
+              </a:rPr>
+              <a:t>●   Si su pregunta cambia la próxima sesión, no es un fracaso: es exactamente para lo que sirve el avance.</a:t>
+            </a:r>
+          </a:p>
+          <a:p>
+            <a:pPr lvl="1">
+              <a:spcAft>
+                <a:spcPts val="600"/>
+              </a:spcAft>
+            </a:pPr>
+            <a:r>
+              <a:rPr sz="1500" b="0" i="0">
+                <a:solidFill>
+                  <a:srgbClr val="2B2B2B"/>
+                </a:solidFill>
+                <a:latin typeface="Calibri"/>
+              </a:rPr>
+              <a:t>●   Tenga a mano su </a:t>
+            </a:r>
+            <a:r>
+              <a:rPr sz="1500" b="1" i="0">
+                <a:solidFill>
+                  <a:srgbClr val="2B2B2B"/>
+                </a:solidFill>
+                <a:latin typeface="Calibri"/>
+              </a:rPr>
+              <a:t>login institucional</a:t>
+            </a:r>
+            <a:r>
+              <a:rPr sz="1500" b="0" i="0">
+                <a:solidFill>
+                  <a:srgbClr val="2B2B2B"/>
+                </a:solidFill>
+                <a:latin typeface="Calibri"/>
+              </a:rPr>
+              <a:t> de la biblioteca CUN: se usa en clase.</a:t>
             </a:r>
           </a:p>
         </p:txBody>
@@ -8516,6 +8834,1411 @@
 </file>
 
 <file path=ppt/slides/slide22.xml><?xml version="1.0" encoding="utf-8"?>
+<p:sld xmlns:a="http://schemas.openxmlformats.org/drawingml/2006/main" xmlns:p="http://schemas.openxmlformats.org/presentationml/2006/main" xmlns:r="http://schemas.openxmlformats.org/officeDocument/2006/relationships">
+  <p:cSld>
+    <p:bg>
+      <p:bgPr>
+        <a:solidFill>
+          <a:srgbClr val="FFFFFF"/>
+        </a:solidFill>
+        <a:effectLst/>
+      </p:bgPr>
+    </p:bg>
+    <p:spTree>
+      <p:nvGrpSpPr>
+        <p:cNvPr id="1" name=""/>
+        <p:cNvGrpSpPr/>
+        <p:nvPr/>
+      </p:nvGrpSpPr>
+      <p:grpSpPr/>
+      <p:sp>
+        <p:nvSpPr>
+          <p:cNvPr id="2" name="Rectangle 1"/>
+          <p:cNvSpPr/>
+          <p:nvPr/>
+        </p:nvSpPr>
+        <p:spPr>
+          <a:xfrm>
+            <a:off x="0" y="0"/>
+            <a:ext cx="12191695" cy="1188720"/>
+          </a:xfrm>
+          <a:prstGeom prst="rect">
+            <a:avLst/>
+          </a:prstGeom>
+          <a:solidFill>
+            <a:srgbClr val="0C2340"/>
+          </a:solidFill>
+          <a:ln>
+            <a:noFill/>
+          </a:ln>
+          <a:effectLst/>
+        </p:spPr>
+        <p:style>
+          <a:lnRef idx="1">
+            <a:schemeClr val="accent1"/>
+          </a:lnRef>
+          <a:fillRef idx="3">
+            <a:schemeClr val="accent1"/>
+          </a:fillRef>
+          <a:effectRef idx="2">
+            <a:schemeClr val="accent1"/>
+          </a:effectRef>
+          <a:fontRef idx="minor">
+            <a:schemeClr val="lt1"/>
+          </a:fontRef>
+        </p:style>
+        <p:txBody>
+          <a:bodyPr rtlCol="0" anchor="ctr"/>
+          <a:lstStyle/>
+          <a:p>
+            <a:pPr algn="ctr"/>
+          </a:p>
+        </p:txBody>
+      </p:sp>
+      <p:sp>
+        <p:nvSpPr>
+          <p:cNvPr id="3" name="TextBox 2"/>
+          <p:cNvSpPr txBox="1"/>
+          <p:nvPr/>
+        </p:nvSpPr>
+        <p:spPr>
+          <a:xfrm>
+            <a:off x="640080" y="0"/>
+            <a:ext cx="9082735" cy="1188720"/>
+          </a:xfrm>
+          <a:prstGeom prst="rect">
+            <a:avLst/>
+          </a:prstGeom>
+          <a:noFill/>
+        </p:spPr>
+        <p:txBody>
+          <a:bodyPr wrap="square" anchor="ctr" lIns="0" rIns="0" tIns="0" bIns="0">
+            <a:spAutoFit/>
+          </a:bodyPr>
+          <a:lstStyle/>
+          <a:p>
+            <a:pPr algn="ctr"/>
+            <a:r>
+              <a:rPr sz="2600" b="1" i="0">
+                <a:solidFill>
+                  <a:srgbClr val="FFFFFF"/>
+                </a:solidFill>
+                <a:latin typeface="Calibri"/>
+              </a:rPr>
+              <a:t>Trabajo autónomo · para la próxima sesión (cont.)</a:t>
+            </a:r>
+          </a:p>
+        </p:txBody>
+      </p:sp>
+      <p:sp>
+        <p:nvSpPr>
+          <p:cNvPr id="4" name="TextBox 3"/>
+          <p:cNvSpPr txBox="1"/>
+          <p:nvPr/>
+        </p:nvSpPr>
+        <p:spPr>
+          <a:xfrm>
+            <a:off x="640080" y="1691639"/>
+            <a:ext cx="10911535" cy="4617720"/>
+          </a:xfrm>
+          <a:prstGeom prst="rect">
+            <a:avLst/>
+          </a:prstGeom>
+          <a:noFill/>
+        </p:spPr>
+        <p:txBody>
+          <a:bodyPr wrap="square" anchor="t" lIns="0" rIns="0" tIns="0" bIns="0">
+            <a:spAutoFit/>
+          </a:bodyPr>
+          <a:lstStyle/>
+          <a:p>
+            <a:pPr>
+              <a:spcAft>
+                <a:spcPts val="1000"/>
+              </a:spcAft>
+            </a:pPr>
+            <a:r>
+              <a:rPr sz="1600" b="0" i="0">
+                <a:solidFill>
+                  <a:srgbClr val="2B2B2B"/>
+                </a:solidFill>
+                <a:latin typeface="Calibri"/>
+              </a:rPr>
+              <a:t>–   Todo el material y las entregas viven en </a:t>
+            </a:r>
+            <a:r>
+              <a:rPr sz="1600" b="1" i="0">
+                <a:solidFill>
+                  <a:srgbClr val="2B2B2B"/>
+                </a:solidFill>
+                <a:latin typeface="Calibri"/>
+              </a:rPr>
+              <a:t>CDigital</a:t>
+            </a:r>
+            <a:r>
+              <a:rPr sz="1600" b="0" i="0">
+                <a:solidFill>
+                  <a:srgbClr val="2B2B2B"/>
+                </a:solidFill>
+                <a:latin typeface="Calibri"/>
+              </a:rPr>
+              <a:t>: https://cdigital.cun.edu.co/course/view.php?id=111070</a:t>
+            </a:r>
+          </a:p>
+        </p:txBody>
+      </p:sp>
+      <p:sp>
+        <p:nvSpPr>
+          <p:cNvPr id="5" name="TextBox 4"/>
+          <p:cNvSpPr txBox="1"/>
+          <p:nvPr/>
+        </p:nvSpPr>
+        <p:spPr>
+          <a:xfrm>
+            <a:off x="11094415" y="6446520"/>
+            <a:ext cx="548640" cy="274320"/>
+          </a:xfrm>
+          <a:prstGeom prst="rect">
+            <a:avLst/>
+          </a:prstGeom>
+          <a:noFill/>
+        </p:spPr>
+        <p:txBody>
+          <a:bodyPr wrap="square" anchor="t" lIns="0" rIns="0" tIns="0" bIns="0">
+            <a:spAutoFit/>
+          </a:bodyPr>
+          <a:lstStyle/>
+          <a:p>
+            <a:pPr algn="r"/>
+            <a:r>
+              <a:rPr sz="1000" b="1" i="0">
+                <a:solidFill>
+                  <a:srgbClr val="8F989D"/>
+                </a:solidFill>
+                <a:latin typeface="Calibri"/>
+              </a:rPr>
+              <a:t>22</a:t>
+            </a:r>
+          </a:p>
+        </p:txBody>
+      </p:sp>
+    </p:spTree>
+  </p:cSld>
+  <p:clrMapOvr>
+    <a:masterClrMapping/>
+  </p:clrMapOvr>
+</p:sld>
+</file>
+
+<file path=ppt/slides/slide23.xml><?xml version="1.0" encoding="utf-8"?>
+<p:sld xmlns:a="http://schemas.openxmlformats.org/drawingml/2006/main" xmlns:p="http://schemas.openxmlformats.org/presentationml/2006/main" xmlns:r="http://schemas.openxmlformats.org/officeDocument/2006/relationships">
+  <p:cSld>
+    <p:bg>
+      <p:bgPr>
+        <a:solidFill>
+          <a:srgbClr val="FFFFFF"/>
+        </a:solidFill>
+        <a:effectLst/>
+      </p:bgPr>
+    </p:bg>
+    <p:spTree>
+      <p:nvGrpSpPr>
+        <p:cNvPr id="1" name=""/>
+        <p:cNvGrpSpPr/>
+        <p:nvPr/>
+      </p:nvGrpSpPr>
+      <p:grpSpPr/>
+      <p:sp>
+        <p:nvSpPr>
+          <p:cNvPr id="2" name="Rectangle 1"/>
+          <p:cNvSpPr/>
+          <p:nvPr/>
+        </p:nvSpPr>
+        <p:spPr>
+          <a:xfrm>
+            <a:off x="0" y="0"/>
+            <a:ext cx="12191695" cy="1188720"/>
+          </a:xfrm>
+          <a:prstGeom prst="rect">
+            <a:avLst/>
+          </a:prstGeom>
+          <a:solidFill>
+            <a:srgbClr val="0C2340"/>
+          </a:solidFill>
+          <a:ln>
+            <a:noFill/>
+          </a:ln>
+          <a:effectLst/>
+        </p:spPr>
+        <p:style>
+          <a:lnRef idx="1">
+            <a:schemeClr val="accent1"/>
+          </a:lnRef>
+          <a:fillRef idx="3">
+            <a:schemeClr val="accent1"/>
+          </a:fillRef>
+          <a:effectRef idx="2">
+            <a:schemeClr val="accent1"/>
+          </a:effectRef>
+          <a:fontRef idx="minor">
+            <a:schemeClr val="lt1"/>
+          </a:fontRef>
+        </p:style>
+        <p:txBody>
+          <a:bodyPr rtlCol="0" anchor="ctr"/>
+          <a:lstStyle/>
+          <a:p>
+            <a:pPr algn="ctr"/>
+          </a:p>
+        </p:txBody>
+      </p:sp>
+      <p:sp>
+        <p:nvSpPr>
+          <p:cNvPr id="3" name="TextBox 2"/>
+          <p:cNvSpPr txBox="1"/>
+          <p:nvPr/>
+        </p:nvSpPr>
+        <p:spPr>
+          <a:xfrm>
+            <a:off x="640080" y="0"/>
+            <a:ext cx="9082735" cy="1188720"/>
+          </a:xfrm>
+          <a:prstGeom prst="rect">
+            <a:avLst/>
+          </a:prstGeom>
+          <a:noFill/>
+        </p:spPr>
+        <p:txBody>
+          <a:bodyPr wrap="square" anchor="ctr" lIns="0" rIns="0" tIns="0" bIns="0">
+            <a:spAutoFit/>
+          </a:bodyPr>
+          <a:lstStyle/>
+          <a:p>
+            <a:pPr algn="ctr"/>
+            <a:r>
+              <a:rPr sz="2600" b="1" i="0">
+                <a:solidFill>
+                  <a:srgbClr val="FFFFFF"/>
+                </a:solidFill>
+                <a:latin typeface="Calibri"/>
+              </a:rPr>
+              <a:t>RUTA DE ENTREGABLES DEL CURSO</a:t>
+            </a:r>
+          </a:p>
+        </p:txBody>
+      </p:sp>
+      <p:sp>
+        <p:nvSpPr>
+          <p:cNvPr id="4" name="TextBox 3"/>
+          <p:cNvSpPr txBox="1"/>
+          <p:nvPr/>
+        </p:nvSpPr>
+        <p:spPr>
+          <a:xfrm>
+            <a:off x="640080" y="1280160"/>
+            <a:ext cx="10911535" cy="411480"/>
+          </a:xfrm>
+          <a:prstGeom prst="rect">
+            <a:avLst/>
+          </a:prstGeom>
+          <a:noFill/>
+        </p:spPr>
+        <p:txBody>
+          <a:bodyPr wrap="square" anchor="t" lIns="0" rIns="0" tIns="0" bIns="0">
+            <a:spAutoFit/>
+          </a:bodyPr>
+          <a:lstStyle/>
+          <a:p>
+            <a:pPr algn="ctr"/>
+            <a:r>
+              <a:rPr sz="1500" b="0" i="0">
+                <a:solidFill>
+                  <a:srgbClr val="2B2B2B"/>
+                </a:solidFill>
+                <a:latin typeface="Calibri"/>
+              </a:rPr>
+              <a:t>Sin fechas a propósito: aquí va </a:t>
+            </a:r>
+            <a:r>
+              <a:rPr sz="1500" b="1" i="0">
+                <a:solidFill>
+                  <a:srgbClr val="2B2B2B"/>
+                </a:solidFill>
+                <a:latin typeface="Calibri"/>
+              </a:rPr>
+              <a:t>en qué punto del curso</a:t>
+            </a:r>
+            <a:r>
+              <a:rPr sz="1500" b="0" i="0">
+                <a:solidFill>
+                  <a:srgbClr val="2B2B2B"/>
+                </a:solidFill>
+                <a:latin typeface="Calibri"/>
+              </a:rPr>
+              <a:t> cierra cada ítem · la ventana exacta la fija CDigital</a:t>
+            </a:r>
+          </a:p>
+        </p:txBody>
+      </p:sp>
+      <p:graphicFrame>
+        <p:nvGraphicFramePr>
+          <p:cNvPr id="5" name="Table 4"/>
+          <p:cNvGraphicFramePr>
+            <a:graphicFrameLocks noGrp="1"/>
+          </p:cNvGraphicFramePr>
+          <p:nvPr/>
+        </p:nvGraphicFramePr>
+        <p:xfrm>
+          <a:off x="640080" y="2011679"/>
+          <a:ext cx="10911533" cy="4297680"/>
+        </p:xfrm>
+        <a:graphic>
+          <a:graphicData uri="http://schemas.openxmlformats.org/drawingml/2006/table">
+            <a:tbl>
+              <a:tblPr>
+                <a:tableStyleId>{2D5ABB26-0587-4C30-8999-92F81FD0307C}</a:tableStyleId>
+              </a:tblPr>
+              <a:tblGrid>
+                <a:gridCol w="2659113"/>
+                <a:gridCol w="2659113"/>
+                <a:gridCol w="5593307"/>
+              </a:tblGrid>
+              <a:tr h="477520">
+                <a:tc>
+                  <a:txBody>
+                    <a:bodyPr/>
+                    <a:lstStyle/>
+                    <a:p>
+                      <a:pPr algn="l"/>
+                      <a:r>
+                        <a:rPr sz="1300" b="1" i="0">
+                          <a:solidFill>
+                            <a:srgbClr val="FFFFFF"/>
+                          </a:solidFill>
+                          <a:latin typeface="Calibri"/>
+                        </a:rPr>
+                        <a:t>Cierra en la semana de…</a:t>
+                      </a:r>
+                    </a:p>
+                  </a:txBody>
+                  <a:tcPr anchor="ctr" marL="109728" marR="91440" marT="36576" marB="36576">
+                    <a:solidFill>
+                      <a:srgbClr val="0C2340"/>
+                    </a:solidFill>
+                  </a:tcPr>
+                </a:tc>
+                <a:tc>
+                  <a:txBody>
+                    <a:bodyPr/>
+                    <a:lstStyle/>
+                    <a:p>
+                      <a:pPr algn="l"/>
+                      <a:r>
+                        <a:rPr sz="1300" b="1" i="0">
+                          <a:solidFill>
+                            <a:srgbClr val="FFFFFF"/>
+                          </a:solidFill>
+                          <a:latin typeface="Calibri"/>
+                        </a:rPr>
+                        <a:t>Entregable</a:t>
+                      </a:r>
+                    </a:p>
+                  </a:txBody>
+                  <a:tcPr anchor="ctr" marL="109728" marR="91440" marT="36576" marB="36576">
+                    <a:solidFill>
+                      <a:srgbClr val="0C2340"/>
+                    </a:solidFill>
+                  </a:tcPr>
+                </a:tc>
+                <a:tc>
+                  <a:txBody>
+                    <a:bodyPr/>
+                    <a:lstStyle/>
+                    <a:p>
+                      <a:pPr algn="l"/>
+                      <a:r>
+                        <a:rPr sz="1300" b="1" i="0">
+                          <a:solidFill>
+                            <a:srgbClr val="FFFFFF"/>
+                          </a:solidFill>
+                          <a:latin typeface="Calibri"/>
+                        </a:rPr>
+                        <a:t>Qué debes tener listo</a:t>
+                      </a:r>
+                    </a:p>
+                  </a:txBody>
+                  <a:tcPr anchor="ctr" marL="109728" marR="91440" marT="36576" marB="36576">
+                    <a:solidFill>
+                      <a:srgbClr val="0C2340"/>
+                    </a:solidFill>
+                  </a:tcPr>
+                </a:tc>
+              </a:tr>
+              <a:tr h="477520">
+                <a:tc>
+                  <a:txBody>
+                    <a:bodyPr/>
+                    <a:lstStyle/>
+                    <a:p>
+                      <a:pPr algn="l"/>
+                      <a:r>
+                        <a:rPr sz="1100" b="1" i="0">
+                          <a:solidFill>
+                            <a:srgbClr val="2B2B2B"/>
+                          </a:solidFill>
+                          <a:latin typeface="Calibri"/>
+                        </a:rPr>
+                        <a:t>Sesión 02</a:t>
+                      </a:r>
+                      <a:r>
+                        <a:rPr sz="1100" b="0" i="0">
+                          <a:solidFill>
+                            <a:srgbClr val="2B2B2B"/>
+                          </a:solidFill>
+                          <a:latin typeface="Calibri"/>
+                        </a:rPr>
+                        <a:t> · ya cerró</a:t>
+                      </a:r>
+                    </a:p>
+                  </a:txBody>
+                  <a:tcPr anchor="ctr" marL="109728" marR="91440" marT="36576" marB="36576">
+                    <a:solidFill>
+                      <a:srgbClr val="FFFFFF"/>
+                    </a:solidFill>
+                  </a:tcPr>
+                </a:tc>
+                <a:tc>
+                  <a:txBody>
+                    <a:bodyPr/>
+                    <a:lstStyle/>
+                    <a:p>
+                      <a:pPr algn="l"/>
+                      <a:r>
+                        <a:rPr sz="1100" b="1" i="0">
+                          <a:solidFill>
+                            <a:srgbClr val="2B2B2B"/>
+                          </a:solidFill>
+                          <a:latin typeface="Calibri"/>
+                        </a:rPr>
+                        <a:t>Quiz 1</a:t>
+                      </a:r>
+                      <a:r>
+                        <a:rPr sz="1100" b="0" i="0">
+                          <a:solidFill>
+                            <a:srgbClr val="2B2B2B"/>
+                          </a:solidFill>
+                          <a:latin typeface="Calibri"/>
+                        </a:rPr>
+                        <a:t> · Cuestionario · 6%</a:t>
+                      </a:r>
+                    </a:p>
+                  </a:txBody>
+                  <a:tcPr anchor="ctr" marL="109728" marR="91440" marT="36576" marB="36576">
+                    <a:solidFill>
+                      <a:srgbClr val="FFFFFF"/>
+                    </a:solidFill>
+                  </a:tcPr>
+                </a:tc>
+                <a:tc>
+                  <a:txBody>
+                    <a:bodyPr/>
+                    <a:lstStyle/>
+                    <a:p>
+                      <a:pPr algn="l"/>
+                      <a:r>
+                        <a:rPr sz="1100" b="0" i="0">
+                          <a:solidFill>
+                            <a:srgbClr val="2B2B2B"/>
+                          </a:solidFill>
+                          <a:latin typeface="Calibri"/>
+                        </a:rPr>
+                        <a:t>Ten claras las </a:t>
+                      </a:r>
+                      <a:r>
+                        <a:rPr sz="1100" b="1" i="0">
+                          <a:solidFill>
+                            <a:srgbClr val="2B2B2B"/>
+                          </a:solidFill>
+                          <a:latin typeface="Calibri"/>
+                        </a:rPr>
+                        <a:t>etapas del método</a:t>
+                      </a:r>
+                      <a:r>
+                        <a:rPr sz="1100" b="0" i="0">
+                          <a:solidFill>
+                            <a:srgbClr val="2B2B2B"/>
+                          </a:solidFill>
+                          <a:latin typeface="Calibri"/>
+                        </a:rPr>
+                        <a:t> y qué es un artículo de nuevo conocimiento.</a:t>
+                      </a:r>
+                    </a:p>
+                  </a:txBody>
+                  <a:tcPr anchor="ctr" marL="109728" marR="91440" marT="36576" marB="36576">
+                    <a:solidFill>
+                      <a:srgbClr val="FFFFFF"/>
+                    </a:solidFill>
+                  </a:tcPr>
+                </a:tc>
+              </a:tr>
+              <a:tr h="477520">
+                <a:tc>
+                  <a:txBody>
+                    <a:bodyPr/>
+                    <a:lstStyle/>
+                    <a:p>
+                      <a:pPr algn="l"/>
+                      <a:r>
+                        <a:rPr sz="1100" b="1" i="0">
+                          <a:solidFill>
+                            <a:srgbClr val="2B2B2B"/>
+                          </a:solidFill>
+                          <a:latin typeface="Calibri"/>
+                        </a:rPr>
+                        <a:t>Sesión 03</a:t>
+                      </a:r>
+                      <a:r>
+                        <a:rPr sz="1100" b="0" i="0">
+                          <a:solidFill>
+                            <a:srgbClr val="2B2B2B"/>
+                          </a:solidFill>
+                          <a:latin typeface="Calibri"/>
+                        </a:rPr>
+                        <a:t> · cierra esta semana</a:t>
+                      </a:r>
+                    </a:p>
+                  </a:txBody>
+                  <a:tcPr anchor="ctr" marL="109728" marR="91440" marT="36576" marB="36576">
+                    <a:solidFill>
+                      <a:srgbClr val="F2F2F2"/>
+                    </a:solidFill>
+                  </a:tcPr>
+                </a:tc>
+                <a:tc>
+                  <a:txBody>
+                    <a:bodyPr/>
+                    <a:lstStyle/>
+                    <a:p>
+                      <a:pPr algn="l"/>
+                      <a:r>
+                        <a:rPr sz="1100" b="1" i="0">
+                          <a:solidFill>
+                            <a:srgbClr val="2B2B2B"/>
+                          </a:solidFill>
+                          <a:latin typeface="Calibri"/>
+                        </a:rPr>
+                        <a:t>Parcial 1</a:t>
+                      </a:r>
+                      <a:r>
+                        <a:rPr sz="1100" b="0" i="0">
+                          <a:solidFill>
+                            <a:srgbClr val="2B2B2B"/>
+                          </a:solidFill>
+                          <a:latin typeface="Calibri"/>
+                        </a:rPr>
+                        <a:t> · Cuestionario · 24%</a:t>
+                      </a:r>
+                    </a:p>
+                  </a:txBody>
+                  <a:tcPr anchor="ctr" marL="109728" marR="91440" marT="36576" marB="36576">
+                    <a:solidFill>
+                      <a:srgbClr val="F2F2F2"/>
+                    </a:solidFill>
+                  </a:tcPr>
+                </a:tc>
+                <a:tc>
+                  <a:txBody>
+                    <a:bodyPr/>
+                    <a:lstStyle/>
+                    <a:p>
+                      <a:pPr algn="l"/>
+                      <a:r>
+                        <a:rPr sz="1100" b="0" i="0">
+                          <a:solidFill>
+                            <a:srgbClr val="2B2B2B"/>
+                          </a:solidFill>
+                          <a:latin typeface="Calibri"/>
+                        </a:rPr>
+                        <a:t>Ten memorizadas las </a:t>
+                      </a:r>
+                      <a:r>
+                        <a:rPr sz="1100" b="1" i="0">
+                          <a:solidFill>
+                            <a:srgbClr val="2B2B2B"/>
+                          </a:solidFill>
+                          <a:latin typeface="Calibri"/>
+                        </a:rPr>
+                        <a:t>6 líneas</a:t>
+                      </a:r>
+                      <a:r>
+                        <a:rPr sz="1100" b="0" i="0">
+                          <a:solidFill>
+                            <a:srgbClr val="2B2B2B"/>
+                          </a:solidFill>
+                          <a:latin typeface="Calibri"/>
+                        </a:rPr>
+                        <a:t> de MinCiencias y en cuál se ubica tu tema, y por qué.</a:t>
+                      </a:r>
+                    </a:p>
+                  </a:txBody>
+                  <a:tcPr anchor="ctr" marL="109728" marR="91440" marT="36576" marB="36576">
+                    <a:solidFill>
+                      <a:srgbClr val="F2F2F2"/>
+                    </a:solidFill>
+                  </a:tcPr>
+                </a:tc>
+              </a:tr>
+              <a:tr h="477520">
+                <a:tc>
+                  <a:txBody>
+                    <a:bodyPr/>
+                    <a:lstStyle/>
+                    <a:p>
+                      <a:pPr algn="l"/>
+                      <a:r>
+                        <a:rPr sz="1100" b="1" i="0">
+                          <a:solidFill>
+                            <a:srgbClr val="2B2B2B"/>
+                          </a:solidFill>
+                          <a:latin typeface="Calibri"/>
+                        </a:rPr>
+                        <a:t>Sesión 04</a:t>
+                      </a:r>
+                      <a:r>
+                        <a:rPr sz="1100" b="0" i="0">
+                          <a:solidFill>
+                            <a:srgbClr val="2B2B2B"/>
+                          </a:solidFill>
+                          <a:latin typeface="Calibri"/>
+                        </a:rPr>
+                        <a:t> · pendiente</a:t>
+                      </a:r>
+                    </a:p>
+                  </a:txBody>
+                  <a:tcPr anchor="ctr" marL="109728" marR="91440" marT="36576" marB="36576">
+                    <a:solidFill>
+                      <a:srgbClr val="FFFFFF"/>
+                    </a:solidFill>
+                  </a:tcPr>
+                </a:tc>
+                <a:tc>
+                  <a:txBody>
+                    <a:bodyPr/>
+                    <a:lstStyle/>
+                    <a:p>
+                      <a:pPr algn="l"/>
+                      <a:r>
+                        <a:rPr sz="1100" b="1" i="0">
+                          <a:solidFill>
+                            <a:srgbClr val="2B2B2B"/>
+                          </a:solidFill>
+                          <a:latin typeface="Calibri"/>
+                        </a:rPr>
+                        <a:t>Quiz 2</a:t>
+                      </a:r>
+                      <a:r>
+                        <a:rPr sz="1100" b="0" i="0">
+                          <a:solidFill>
+                            <a:srgbClr val="2B2B2B"/>
+                          </a:solidFill>
+                          <a:latin typeface="Calibri"/>
+                        </a:rPr>
+                        <a:t> · Cuestionario · 9%</a:t>
+                      </a:r>
+                    </a:p>
+                  </a:txBody>
+                  <a:tcPr anchor="ctr" marL="109728" marR="91440" marT="36576" marB="36576">
+                    <a:solidFill>
+                      <a:srgbClr val="FFFFFF"/>
+                    </a:solidFill>
+                  </a:tcPr>
+                </a:tc>
+                <a:tc>
+                  <a:txBody>
+                    <a:bodyPr/>
+                    <a:lstStyle/>
+                    <a:p>
+                      <a:pPr algn="l"/>
+                      <a:r>
+                        <a:rPr sz="1100" b="0" i="0">
+                          <a:solidFill>
+                            <a:srgbClr val="2B2B2B"/>
+                          </a:solidFill>
+                          <a:latin typeface="Calibri"/>
+                        </a:rPr>
+                        <a:t>Distingue </a:t>
+                      </a:r>
+                      <a:r>
+                        <a:rPr sz="1100" b="1" i="0">
+                          <a:solidFill>
+                            <a:srgbClr val="2B2B2B"/>
+                          </a:solidFill>
+                          <a:latin typeface="Calibri"/>
+                        </a:rPr>
+                        <a:t>tipos de fuente</a:t>
+                      </a:r>
+                      <a:r>
+                        <a:rPr sz="1100" b="0" i="0">
+                          <a:solidFill>
+                            <a:srgbClr val="2B2B2B"/>
+                          </a:solidFill>
+                          <a:latin typeface="Calibri"/>
+                        </a:rPr>
+                        <a:t> y qué la hace confiable: quién firma, dónde y de cuándo es.</a:t>
+                      </a:r>
+                    </a:p>
+                  </a:txBody>
+                  <a:tcPr anchor="ctr" marL="109728" marR="91440" marT="36576" marB="36576">
+                    <a:solidFill>
+                      <a:srgbClr val="FFFFFF"/>
+                    </a:solidFill>
+                  </a:tcPr>
+                </a:tc>
+              </a:tr>
+              <a:tr h="477520">
+                <a:tc>
+                  <a:txBody>
+                    <a:bodyPr/>
+                    <a:lstStyle/>
+                    <a:p>
+                      <a:pPr algn="l"/>
+                      <a:r>
+                        <a:rPr sz="1100" b="1" i="0">
+                          <a:solidFill>
+                            <a:srgbClr val="2B2B2B"/>
+                          </a:solidFill>
+                          <a:latin typeface="Calibri"/>
+                        </a:rPr>
+                        <a:t>Sesión 05</a:t>
+                      </a:r>
+                      <a:r>
+                        <a:rPr sz="1100" b="0" i="0">
+                          <a:solidFill>
+                            <a:srgbClr val="2B2B2B"/>
+                          </a:solidFill>
+                          <a:latin typeface="Calibri"/>
+                        </a:rPr>
+                        <a:t> · pendiente</a:t>
+                      </a:r>
+                    </a:p>
+                  </a:txBody>
+                  <a:tcPr anchor="ctr" marL="109728" marR="91440" marT="36576" marB="36576">
+                    <a:solidFill>
+                      <a:srgbClr val="F2F2F2"/>
+                    </a:solidFill>
+                  </a:tcPr>
+                </a:tc>
+                <a:tc>
+                  <a:txBody>
+                    <a:bodyPr/>
+                    <a:lstStyle/>
+                    <a:p>
+                      <a:pPr algn="l"/>
+                      <a:r>
+                        <a:rPr sz="1100" b="1" i="0">
+                          <a:solidFill>
+                            <a:srgbClr val="2B2B2B"/>
+                          </a:solidFill>
+                          <a:latin typeface="Calibri"/>
+                        </a:rPr>
+                        <a:t>Parcial 2</a:t>
+                      </a:r>
+                      <a:r>
+                        <a:rPr sz="1100" b="0" i="0">
+                          <a:solidFill>
+                            <a:srgbClr val="2B2B2B"/>
+                          </a:solidFill>
+                          <a:latin typeface="Calibri"/>
+                        </a:rPr>
+                        <a:t> · Cuestionario · 21%</a:t>
+                      </a:r>
+                    </a:p>
+                  </a:txBody>
+                  <a:tcPr anchor="ctr" marL="109728" marR="91440" marT="36576" marB="36576">
+                    <a:solidFill>
+                      <a:srgbClr val="F2F2F2"/>
+                    </a:solidFill>
+                  </a:tcPr>
+                </a:tc>
+                <a:tc>
+                  <a:txBody>
+                    <a:bodyPr/>
+                    <a:lstStyle/>
+                    <a:p>
+                      <a:pPr algn="l"/>
+                      <a:r>
+                        <a:rPr sz="1100" b="0" i="0">
+                          <a:solidFill>
+                            <a:srgbClr val="2B2B2B"/>
+                          </a:solidFill>
+                          <a:latin typeface="Calibri"/>
+                        </a:rPr>
+                        <a:t>Domina problema, pregunta y objetivo, búsqueda con operadores y citas en </a:t>
+                      </a:r>
+                      <a:r>
+                        <a:rPr sz="1100" b="1" i="0">
+                          <a:solidFill>
+                            <a:srgbClr val="2B2B2B"/>
+                          </a:solidFill>
+                          <a:latin typeface="Calibri"/>
+                        </a:rPr>
+                        <a:t>APA 7</a:t>
+                      </a:r>
+                      <a:r>
+                        <a:rPr sz="1100" b="0" i="0">
+                          <a:solidFill>
+                            <a:srgbClr val="2B2B2B"/>
+                          </a:solidFill>
+                          <a:latin typeface="Calibri"/>
+                        </a:rPr>
+                        <a:t>.</a:t>
+                      </a:r>
+                    </a:p>
+                  </a:txBody>
+                  <a:tcPr anchor="ctr" marL="109728" marR="91440" marT="36576" marB="36576">
+                    <a:solidFill>
+                      <a:srgbClr val="F2F2F2"/>
+                    </a:solidFill>
+                  </a:tcPr>
+                </a:tc>
+              </a:tr>
+              <a:tr h="477520">
+                <a:tc>
+                  <a:txBody>
+                    <a:bodyPr/>
+                    <a:lstStyle/>
+                    <a:p>
+                      <a:pPr algn="l"/>
+                      <a:r>
+                        <a:rPr sz="1100" b="1" i="0">
+                          <a:solidFill>
+                            <a:srgbClr val="2B2B2B"/>
+                          </a:solidFill>
+                          <a:latin typeface="Calibri"/>
+                        </a:rPr>
+                        <a:t>Sesión 05</a:t>
+                      </a:r>
+                      <a:r>
+                        <a:rPr sz="1100" b="0" i="0">
+                          <a:solidFill>
+                            <a:srgbClr val="2B2B2B"/>
+                          </a:solidFill>
+                          <a:latin typeface="Calibri"/>
+                        </a:rPr>
+                        <a:t> · pendiente</a:t>
+                      </a:r>
+                    </a:p>
+                  </a:txBody>
+                  <a:tcPr anchor="ctr" marL="109728" marR="91440" marT="36576" marB="36576">
+                    <a:solidFill>
+                      <a:srgbClr val="FFFFFF"/>
+                    </a:solidFill>
+                  </a:tcPr>
+                </a:tc>
+                <a:tc>
+                  <a:txBody>
+                    <a:bodyPr/>
+                    <a:lstStyle/>
+                    <a:p>
+                      <a:pPr algn="l"/>
+                      <a:r>
+                        <a:rPr sz="1100" b="1" i="0">
+                          <a:solidFill>
+                            <a:srgbClr val="2B2B2B"/>
+                          </a:solidFill>
+                          <a:latin typeface="Calibri"/>
+                        </a:rPr>
+                        <a:t>ACA Final</a:t>
+                      </a:r>
+                      <a:r>
+                        <a:rPr sz="1100" b="0" i="0">
+                          <a:solidFill>
+                            <a:srgbClr val="2B2B2B"/>
+                          </a:solidFill>
+                          <a:latin typeface="Calibri"/>
+                        </a:rPr>
+                        <a:t> · Tarea · 32,8%</a:t>
+                      </a:r>
+                    </a:p>
+                  </a:txBody>
+                  <a:tcPr anchor="ctr" marL="109728" marR="91440" marT="36576" marB="36576">
+                    <a:solidFill>
+                      <a:srgbClr val="FFFFFF"/>
+                    </a:solidFill>
+                  </a:tcPr>
+                </a:tc>
+                <a:tc>
+                  <a:txBody>
+                    <a:bodyPr/>
+                    <a:lstStyle/>
+                    <a:p>
+                      <a:pPr algn="l"/>
+                      <a:r>
+                        <a:rPr sz="1100" b="0" i="0">
+                          <a:solidFill>
+                            <a:srgbClr val="2B2B2B"/>
+                          </a:solidFill>
+                          <a:latin typeface="Calibri"/>
+                        </a:rPr>
+                        <a:t>Sube el </a:t>
+                      </a:r>
+                      <a:r>
+                        <a:rPr sz="1100" b="1" i="0">
+                          <a:solidFill>
+                            <a:srgbClr val="2B2B2B"/>
+                          </a:solidFill>
+                          <a:latin typeface="Calibri"/>
+                        </a:rPr>
+                        <a:t>artículo consolidado</a:t>
+                      </a:r>
+                      <a:r>
+                        <a:rPr sz="1100" b="0" i="0">
+                          <a:solidFill>
+                            <a:srgbClr val="2B2B2B"/>
+                          </a:solidFill>
+                          <a:latin typeface="Calibri"/>
+                        </a:rPr>
+                        <a:t>: problema, pregunta, marco, matriz de fuentes y APA 7.</a:t>
+                      </a:r>
+                    </a:p>
+                  </a:txBody>
+                  <a:tcPr anchor="ctr" marL="109728" marR="91440" marT="36576" marB="36576">
+                    <a:solidFill>
+                      <a:srgbClr val="FFFFFF"/>
+                    </a:solidFill>
+                  </a:tcPr>
+                </a:tc>
+              </a:tr>
+              <a:tr h="477520">
+                <a:tc>
+                  <a:txBody>
+                    <a:bodyPr/>
+                    <a:lstStyle/>
+                    <a:p>
+                      <a:pPr algn="l"/>
+                      <a:r>
+                        <a:rPr sz="1100" b="1" i="0">
+                          <a:solidFill>
+                            <a:srgbClr val="2B2B2B"/>
+                          </a:solidFill>
+                          <a:latin typeface="Calibri"/>
+                        </a:rPr>
+                        <a:t>Sesión 05</a:t>
+                      </a:r>
+                      <a:r>
+                        <a:rPr sz="1100" b="0" i="0">
+                          <a:solidFill>
+                            <a:srgbClr val="2B2B2B"/>
+                          </a:solidFill>
+                          <a:latin typeface="Calibri"/>
+                        </a:rPr>
+                        <a:t> · pendiente</a:t>
+                      </a:r>
+                    </a:p>
+                  </a:txBody>
+                  <a:tcPr anchor="ctr" marL="109728" marR="91440" marT="36576" marB="36576">
+                    <a:solidFill>
+                      <a:srgbClr val="F2F2F2"/>
+                    </a:solidFill>
+                  </a:tcPr>
+                </a:tc>
+                <a:tc>
+                  <a:txBody>
+                    <a:bodyPr/>
+                    <a:lstStyle/>
+                    <a:p>
+                      <a:pPr algn="l"/>
+                      <a:r>
+                        <a:rPr sz="1100" b="1" i="0">
+                          <a:solidFill>
+                            <a:srgbClr val="2B2B2B"/>
+                          </a:solidFill>
+                          <a:latin typeface="Calibri"/>
+                        </a:rPr>
+                        <a:t>Quiz 3</a:t>
+                      </a:r>
+                      <a:r>
+                        <a:rPr sz="1100" b="0" i="0">
+                          <a:solidFill>
+                            <a:srgbClr val="2B2B2B"/>
+                          </a:solidFill>
+                          <a:latin typeface="Calibri"/>
+                        </a:rPr>
+                        <a:t> · Cuestionario · 4%</a:t>
+                      </a:r>
+                    </a:p>
+                  </a:txBody>
+                  <a:tcPr anchor="ctr" marL="109728" marR="91440" marT="36576" marB="36576">
+                    <a:solidFill>
+                      <a:srgbClr val="F2F2F2"/>
+                    </a:solidFill>
+                  </a:tcPr>
+                </a:tc>
+                <a:tc>
+                  <a:txBody>
+                    <a:bodyPr/>
+                    <a:lstStyle/>
+                    <a:p>
+                      <a:pPr algn="l"/>
+                      <a:r>
+                        <a:rPr sz="1100" b="0" i="0">
+                          <a:solidFill>
+                            <a:srgbClr val="2B2B2B"/>
+                          </a:solidFill>
+                          <a:latin typeface="Calibri"/>
+                        </a:rPr>
+                        <a:t>Ten claras las partes del </a:t>
+                      </a:r>
+                      <a:r>
+                        <a:rPr sz="1100" b="1" i="0">
+                          <a:solidFill>
+                            <a:srgbClr val="2B2B2B"/>
+                          </a:solidFill>
+                          <a:latin typeface="Calibri"/>
+                        </a:rPr>
+                        <a:t>planteamiento</a:t>
+                      </a:r>
+                      <a:r>
+                        <a:rPr sz="1100" b="0" i="0">
+                          <a:solidFill>
+                            <a:srgbClr val="2B2B2B"/>
+                          </a:solidFill>
+                          <a:latin typeface="Calibri"/>
+                        </a:rPr>
+                        <a:t> y qué es una revisión de literatura articulada.</a:t>
+                      </a:r>
+                    </a:p>
+                  </a:txBody>
+                  <a:tcPr anchor="ctr" marL="109728" marR="91440" marT="36576" marB="36576">
+                    <a:solidFill>
+                      <a:srgbClr val="F2F2F2"/>
+                    </a:solidFill>
+                  </a:tcPr>
+                </a:tc>
+              </a:tr>
+              <a:tr h="477520">
+                <a:tc>
+                  <a:txBody>
+                    <a:bodyPr/>
+                    <a:lstStyle/>
+                    <a:p>
+                      <a:pPr algn="l"/>
+                      <a:r>
+                        <a:rPr sz="1100" b="1" i="0">
+                          <a:solidFill>
+                            <a:srgbClr val="2B2B2B"/>
+                          </a:solidFill>
+                          <a:latin typeface="Calibri"/>
+                        </a:rPr>
+                        <a:t>Sesión 06</a:t>
+                      </a:r>
+                      <a:r>
+                        <a:rPr sz="1100" b="0" i="0">
+                          <a:solidFill>
+                            <a:srgbClr val="2B2B2B"/>
+                          </a:solidFill>
+                          <a:latin typeface="Calibri"/>
+                        </a:rPr>
+                        <a:t> · pendiente</a:t>
+                      </a:r>
+                    </a:p>
+                  </a:txBody>
+                  <a:tcPr anchor="ctr" marL="109728" marR="91440" marT="36576" marB="36576">
+                    <a:solidFill>
+                      <a:srgbClr val="FFFFFF"/>
+                    </a:solidFill>
+                  </a:tcPr>
+                </a:tc>
+                <a:tc>
+                  <a:txBody>
+                    <a:bodyPr/>
+                    <a:lstStyle/>
+                    <a:p>
+                      <a:pPr algn="l"/>
+                      <a:r>
+                        <a:rPr sz="1100" b="1" i="0">
+                          <a:solidFill>
+                            <a:srgbClr val="2B2B2B"/>
+                          </a:solidFill>
+                          <a:latin typeface="Calibri"/>
+                        </a:rPr>
+                        <a:t>Autoevaluación</a:t>
+                      </a:r>
+                      <a:r>
+                        <a:rPr sz="1100" b="0" i="0">
+                          <a:solidFill>
+                            <a:srgbClr val="2B2B2B"/>
+                          </a:solidFill>
+                          <a:latin typeface="Calibri"/>
+                        </a:rPr>
+                        <a:t> · Cuestionario · 1,6%</a:t>
+                      </a:r>
+                    </a:p>
+                  </a:txBody>
+                  <a:tcPr anchor="ctr" marL="109728" marR="91440" marT="36576" marB="36576">
+                    <a:solidFill>
+                      <a:srgbClr val="FFFFFF"/>
+                    </a:solidFill>
+                  </a:tcPr>
+                </a:tc>
+                <a:tc>
+                  <a:txBody>
+                    <a:bodyPr/>
+                    <a:lstStyle/>
+                    <a:p>
+                      <a:pPr algn="l"/>
+                      <a:r>
+                        <a:rPr sz="1100" b="0" i="0">
+                          <a:solidFill>
+                            <a:srgbClr val="2B2B2B"/>
+                          </a:solidFill>
+                          <a:latin typeface="Calibri"/>
+                        </a:rPr>
+                        <a:t>Diligénciala tú, según tu </a:t>
+                      </a:r>
+                      <a:r>
+                        <a:rPr sz="1100" b="1" i="0">
+                          <a:solidFill>
+                            <a:srgbClr val="2B2B2B"/>
+                          </a:solidFill>
+                          <a:latin typeface="Calibri"/>
+                        </a:rPr>
+                        <a:t>participación real</a:t>
+                      </a:r>
+                      <a:r>
+                        <a:rPr sz="1100" b="0" i="0">
+                          <a:solidFill>
+                            <a:srgbClr val="2B2B2B"/>
+                          </a:solidFill>
+                          <a:latin typeface="Calibri"/>
+                        </a:rPr>
+                        <a:t> en el periodo.</a:t>
+                      </a:r>
+                    </a:p>
+                  </a:txBody>
+                  <a:tcPr anchor="ctr" marL="109728" marR="91440" marT="36576" marB="36576">
+                    <a:solidFill>
+                      <a:srgbClr val="FFFFFF"/>
+                    </a:solidFill>
+                  </a:tcPr>
+                </a:tc>
+              </a:tr>
+              <a:tr h="477520">
+                <a:tc>
+                  <a:txBody>
+                    <a:bodyPr/>
+                    <a:lstStyle/>
+                    <a:p>
+                      <a:pPr algn="l"/>
+                      <a:r>
+                        <a:rPr sz="1100" b="1" i="0">
+                          <a:solidFill>
+                            <a:srgbClr val="2B2B2B"/>
+                          </a:solidFill>
+                          <a:latin typeface="Calibri"/>
+                        </a:rPr>
+                        <a:t>Sesión 06</a:t>
+                      </a:r>
+                      <a:r>
+                        <a:rPr sz="1100" b="0" i="0">
+                          <a:solidFill>
+                            <a:srgbClr val="2B2B2B"/>
+                          </a:solidFill>
+                          <a:latin typeface="Calibri"/>
+                        </a:rPr>
+                        <a:t> · pendiente</a:t>
+                      </a:r>
+                    </a:p>
+                  </a:txBody>
+                  <a:tcPr anchor="ctr" marL="109728" marR="91440" marT="36576" marB="36576">
+                    <a:solidFill>
+                      <a:srgbClr val="F2F2F2"/>
+                    </a:solidFill>
+                  </a:tcPr>
+                </a:tc>
+                <a:tc>
+                  <a:txBody>
+                    <a:bodyPr/>
+                    <a:lstStyle/>
+                    <a:p>
+                      <a:pPr algn="l"/>
+                      <a:r>
+                        <a:rPr sz="1100" b="1" i="0">
+                          <a:solidFill>
+                            <a:srgbClr val="2B2B2B"/>
+                          </a:solidFill>
+                          <a:latin typeface="Calibri"/>
+                        </a:rPr>
+                        <a:t>Coevaluación</a:t>
+                      </a:r>
+                      <a:r>
+                        <a:rPr sz="1100" b="0" i="0">
+                          <a:solidFill>
+                            <a:srgbClr val="2B2B2B"/>
+                          </a:solidFill>
+                          <a:latin typeface="Calibri"/>
+                        </a:rPr>
+                        <a:t> · Foro · 1,6%</a:t>
+                      </a:r>
+                    </a:p>
+                  </a:txBody>
+                  <a:tcPr anchor="ctr" marL="109728" marR="91440" marT="36576" marB="36576">
+                    <a:solidFill>
+                      <a:srgbClr val="F2F2F2"/>
+                    </a:solidFill>
+                  </a:tcPr>
+                </a:tc>
+                <a:tc>
+                  <a:txBody>
+                    <a:bodyPr/>
+                    <a:lstStyle/>
+                    <a:p>
+                      <a:pPr algn="l"/>
+                      <a:r>
+                        <a:rPr sz="1100" b="1" i="0">
+                          <a:solidFill>
+                            <a:srgbClr val="2B2B2B"/>
+                          </a:solidFill>
+                          <a:latin typeface="Calibri"/>
+                        </a:rPr>
+                        <a:t>Publica tu aporte</a:t>
+                      </a:r>
+                      <a:r>
+                        <a:rPr sz="1100" b="0" i="0">
+                          <a:solidFill>
+                            <a:srgbClr val="2B2B2B"/>
+                          </a:solidFill>
+                          <a:latin typeface="Calibri"/>
+                        </a:rPr>
+                        <a:t>: valora con respeto hechos del trabajo del equipo, no personas.</a:t>
+                      </a:r>
+                    </a:p>
+                  </a:txBody>
+                  <a:tcPr anchor="ctr" marL="109728" marR="91440" marT="36576" marB="36576">
+                    <a:solidFill>
+                      <a:srgbClr val="F2F2F2"/>
+                    </a:solidFill>
+                  </a:tcPr>
+                </a:tc>
+              </a:tr>
+            </a:tbl>
+          </a:graphicData>
+        </a:graphic>
+      </p:graphicFrame>
+      <p:sp>
+        <p:nvSpPr>
+          <p:cNvPr id="6" name="TextBox 5"/>
+          <p:cNvSpPr txBox="1"/>
+          <p:nvPr/>
+        </p:nvSpPr>
+        <p:spPr>
+          <a:xfrm>
+            <a:off x="640080" y="6080760"/>
+            <a:ext cx="10911535" cy="548640"/>
+          </a:xfrm>
+          <a:prstGeom prst="rect">
+            <a:avLst/>
+          </a:prstGeom>
+          <a:noFill/>
+        </p:spPr>
+        <p:txBody>
+          <a:bodyPr wrap="square" anchor="t" lIns="0" rIns="0" tIns="0" bIns="0">
+            <a:spAutoFit/>
+          </a:bodyPr>
+          <a:lstStyle/>
+          <a:p>
+            <a:r>
+              <a:rPr sz="1200" b="0" i="1">
+                <a:solidFill>
+                  <a:srgbClr val="2B2B2B"/>
+                </a:solidFill>
+                <a:latin typeface="Calibri"/>
+              </a:rPr>
+              <a:t>Esta misma tabla va al final de todas las sesiones. La </a:t>
+            </a:r>
+            <a:r>
+              <a:rPr sz="1200" b="1" i="1">
+                <a:solidFill>
+                  <a:srgbClr val="2B2B2B"/>
+                </a:solidFill>
+                <a:latin typeface="Calibri"/>
+              </a:rPr>
+              <a:t>fecha</a:t>
+            </a:r>
+            <a:r>
+              <a:rPr sz="1200" b="0" i="1">
+                <a:solidFill>
+                  <a:srgbClr val="2B2B2B"/>
+                </a:solidFill>
+                <a:latin typeface="Calibri"/>
+              </a:rPr>
+              <a:t> de cada ventana está en el enunciado del ítem (`Clases/Recursos/ACAs/`) y en el aula: si el aula y cualquier otro material se contradicen, </a:t>
+            </a:r>
+            <a:r>
+              <a:rPr sz="1200" b="1" i="1">
+                <a:solidFill>
+                  <a:srgbClr val="2B2B2B"/>
+                </a:solidFill>
+                <a:latin typeface="Calibri"/>
+              </a:rPr>
+              <a:t>manda el aula</a:t>
+            </a:r>
+            <a:r>
+              <a:rPr sz="1200" b="0" i="1">
+                <a:solidFill>
+                  <a:srgbClr val="2B2B2B"/>
+                </a:solidFill>
+                <a:latin typeface="Calibri"/>
+              </a:rPr>
+              <a:t>.</a:t>
+            </a:r>
+          </a:p>
+        </p:txBody>
+      </p:sp>
+      <p:sp>
+        <p:nvSpPr>
+          <p:cNvPr id="7" name="TextBox 6"/>
+          <p:cNvSpPr txBox="1"/>
+          <p:nvPr/>
+        </p:nvSpPr>
+        <p:spPr>
+          <a:xfrm>
+            <a:off x="11094415" y="6446520"/>
+            <a:ext cx="548640" cy="274320"/>
+          </a:xfrm>
+          <a:prstGeom prst="rect">
+            <a:avLst/>
+          </a:prstGeom>
+          <a:noFill/>
+        </p:spPr>
+        <p:txBody>
+          <a:bodyPr wrap="square" anchor="t" lIns="0" rIns="0" tIns="0" bIns="0">
+            <a:spAutoFit/>
+          </a:bodyPr>
+          <a:lstStyle/>
+          <a:p>
+            <a:pPr algn="r"/>
+            <a:r>
+              <a:rPr sz="1000" b="1" i="0">
+                <a:solidFill>
+                  <a:srgbClr val="8F989D"/>
+                </a:solidFill>
+                <a:latin typeface="Calibri"/>
+              </a:rPr>
+              <a:t>23</a:t>
+            </a:r>
+          </a:p>
+        </p:txBody>
+      </p:sp>
+    </p:spTree>
+  </p:cSld>
+  <p:clrMapOvr>
+    <a:masterClrMapping/>
+  </p:clrMapOvr>
+</p:sld>
+</file>
+
+<file path=ppt/slides/slide24.xml><?xml version="1.0" encoding="utf-8"?>
 <p:sld xmlns:a="http://schemas.openxmlformats.org/drawingml/2006/main" xmlns:p="http://schemas.openxmlformats.org/presentationml/2006/main" xmlns:r="http://schemas.openxmlformats.org/officeDocument/2006/relationships">
   <p:cSld>
     <p:bg>
